--- a/workflow_analysis/spm_figures/spm_dags/pyflextrkr_dag_split.pptx
+++ b/workflow_analysis/spm_figures/spm_dags/pyflextrkr_dag_split.pptx
@@ -3346,9 +3346,9 @@
         </p:nvGrpSpPr>
         <p:grpSpPr>
           <a:xfrm>
-            <a:off x="-1246141" y="979768"/>
+            <a:off x="-1243195" y="1070957"/>
             <a:ext cx="232695" cy="1433670"/>
-            <a:chOff x="1934231" y="675017"/>
+            <a:chOff x="1936265" y="766206"/>
             <a:chExt cx="160691" cy="1433670"/>
           </a:xfrm>
         </p:grpSpPr>
@@ -3369,7 +3369,7 @@
           </p:nvCxnSpPr>
           <p:spPr>
             <a:xfrm flipV="1">
-              <a:off x="1934232" y="675017"/>
+              <a:off x="1936265" y="766206"/>
               <a:ext cx="160690" cy="1"/>
             </a:xfrm>
             <a:prstGeom prst="straightConnector1">
@@ -3414,7 +3414,7 @@
           </p:nvCxnSpPr>
           <p:spPr>
             <a:xfrm flipV="1">
-              <a:off x="1934231" y="1152907"/>
+              <a:off x="1936265" y="1244096"/>
               <a:ext cx="160690" cy="1"/>
             </a:xfrm>
             <a:prstGeom prst="straightConnector1">
@@ -3459,7 +3459,7 @@
           </p:nvCxnSpPr>
           <p:spPr>
             <a:xfrm>
-              <a:off x="1934232" y="1630797"/>
+              <a:off x="1936266" y="1721986"/>
               <a:ext cx="160690" cy="0"/>
             </a:xfrm>
             <a:prstGeom prst="straightConnector1">
@@ -3504,7 +3504,7 @@
           </p:nvCxnSpPr>
           <p:spPr>
             <a:xfrm>
-              <a:off x="1934232" y="2108687"/>
+              <a:off x="1936266" y="2199876"/>
               <a:ext cx="160690" cy="0"/>
             </a:xfrm>
             <a:prstGeom prst="straightConnector1">
@@ -3535,1037 +3535,6 @@
       </p:grpSp>
       <p:grpSp>
         <p:nvGrpSpPr>
-          <p:cNvPr id="450" name="Group 449">
-            <a:extLst>
-              <a:ext uri="{FF2B5EF4-FFF2-40B4-BE49-F238E27FC236}">
-                <a16:creationId xmlns:a16="http://schemas.microsoft.com/office/drawing/2014/main" id="{246C670D-A069-AA83-E67C-2C3C97D66BBE}"/>
-              </a:ext>
-            </a:extLst>
-          </p:cNvPr>
-          <p:cNvGrpSpPr/>
-          <p:nvPr/>
-        </p:nvGrpSpPr>
-        <p:grpSpPr>
-          <a:xfrm>
-            <a:off x="7645457" y="3437412"/>
-            <a:ext cx="219925" cy="1790773"/>
-            <a:chOff x="4092396" y="2384611"/>
-            <a:chExt cx="304800" cy="1528482"/>
-          </a:xfrm>
-          <a:solidFill>
-            <a:srgbClr val="00B0F0"/>
-          </a:solidFill>
-        </p:grpSpPr>
-        <p:sp>
-          <p:nvSpPr>
-            <p:cNvPr id="451" name="Rectangle 450">
-              <a:extLst>
-                <a:ext uri="{FF2B5EF4-FFF2-40B4-BE49-F238E27FC236}">
-                  <a16:creationId xmlns:a16="http://schemas.microsoft.com/office/drawing/2014/main" id="{B8786BB7-6219-5244-6BF4-335B111D2735}"/>
-                </a:ext>
-              </a:extLst>
-            </p:cNvPr>
-            <p:cNvSpPr/>
-            <p:nvPr/>
-          </p:nvSpPr>
-          <p:spPr>
-            <a:xfrm>
-              <a:off x="4092396" y="2384611"/>
-              <a:ext cx="304800" cy="304800"/>
-            </a:xfrm>
-            <a:prstGeom prst="rect">
-              <a:avLst/>
-            </a:prstGeom>
-            <a:grpFill/>
-            <a:ln>
-              <a:noFill/>
-            </a:ln>
-          </p:spPr>
-          <p:style>
-            <a:lnRef idx="2">
-              <a:schemeClr val="accent1">
-                <a:shade val="15000"/>
-              </a:schemeClr>
-            </a:lnRef>
-            <a:fillRef idx="1">
-              <a:schemeClr val="accent1"/>
-            </a:fillRef>
-            <a:effectRef idx="0">
-              <a:schemeClr val="accent1"/>
-            </a:effectRef>
-            <a:fontRef idx="minor">
-              <a:schemeClr val="lt1"/>
-            </a:fontRef>
-          </p:style>
-          <p:txBody>
-            <a:bodyPr rtlCol="0" anchor="ctr"/>
-            <a:lstStyle/>
-            <a:p>
-              <a:pPr algn="ctr"/>
-              <a:endParaRPr lang="en-US" sz="2000" b="1"/>
-            </a:p>
-          </p:txBody>
-        </p:sp>
-        <p:sp>
-          <p:nvSpPr>
-            <p:cNvPr id="452" name="Rectangle 451">
-              <a:extLst>
-                <a:ext uri="{FF2B5EF4-FFF2-40B4-BE49-F238E27FC236}">
-                  <a16:creationId xmlns:a16="http://schemas.microsoft.com/office/drawing/2014/main" id="{9F9C5C41-4BE9-CA66-B8A5-C847A25501AE}"/>
-                </a:ext>
-              </a:extLst>
-            </p:cNvPr>
-            <p:cNvSpPr/>
-            <p:nvPr/>
-          </p:nvSpPr>
-          <p:spPr>
-            <a:xfrm>
-              <a:off x="4092396" y="2792505"/>
-              <a:ext cx="304800" cy="304800"/>
-            </a:xfrm>
-            <a:prstGeom prst="rect">
-              <a:avLst/>
-            </a:prstGeom>
-            <a:grpFill/>
-            <a:ln>
-              <a:noFill/>
-            </a:ln>
-          </p:spPr>
-          <p:style>
-            <a:lnRef idx="2">
-              <a:schemeClr val="accent1">
-                <a:shade val="15000"/>
-              </a:schemeClr>
-            </a:lnRef>
-            <a:fillRef idx="1">
-              <a:schemeClr val="accent1"/>
-            </a:fillRef>
-            <a:effectRef idx="0">
-              <a:schemeClr val="accent1"/>
-            </a:effectRef>
-            <a:fontRef idx="minor">
-              <a:schemeClr val="lt1"/>
-            </a:fontRef>
-          </p:style>
-          <p:txBody>
-            <a:bodyPr rtlCol="0" anchor="ctr"/>
-            <a:lstStyle/>
-            <a:p>
-              <a:pPr algn="ctr"/>
-              <a:endParaRPr lang="en-US" sz="2000" b="1"/>
-            </a:p>
-          </p:txBody>
-        </p:sp>
-        <p:sp>
-          <p:nvSpPr>
-            <p:cNvPr id="453" name="Rectangle 452">
-              <a:extLst>
-                <a:ext uri="{FF2B5EF4-FFF2-40B4-BE49-F238E27FC236}">
-                  <a16:creationId xmlns:a16="http://schemas.microsoft.com/office/drawing/2014/main" id="{FE8AEF53-E51E-61A5-0815-67D02E9C7EAC}"/>
-                </a:ext>
-              </a:extLst>
-            </p:cNvPr>
-            <p:cNvSpPr/>
-            <p:nvPr/>
-          </p:nvSpPr>
-          <p:spPr>
-            <a:xfrm>
-              <a:off x="4092396" y="3200399"/>
-              <a:ext cx="304800" cy="304800"/>
-            </a:xfrm>
-            <a:prstGeom prst="rect">
-              <a:avLst/>
-            </a:prstGeom>
-            <a:grpFill/>
-            <a:ln>
-              <a:noFill/>
-            </a:ln>
-          </p:spPr>
-          <p:style>
-            <a:lnRef idx="2">
-              <a:schemeClr val="accent1">
-                <a:shade val="15000"/>
-              </a:schemeClr>
-            </a:lnRef>
-            <a:fillRef idx="1">
-              <a:schemeClr val="accent1"/>
-            </a:fillRef>
-            <a:effectRef idx="0">
-              <a:schemeClr val="accent1"/>
-            </a:effectRef>
-            <a:fontRef idx="minor">
-              <a:schemeClr val="lt1"/>
-            </a:fontRef>
-          </p:style>
-          <p:txBody>
-            <a:bodyPr rtlCol="0" anchor="ctr"/>
-            <a:lstStyle/>
-            <a:p>
-              <a:pPr algn="ctr"/>
-              <a:endParaRPr lang="en-US" sz="2000" b="1"/>
-            </a:p>
-          </p:txBody>
-        </p:sp>
-        <p:sp>
-          <p:nvSpPr>
-            <p:cNvPr id="454" name="Rectangle 453">
-              <a:extLst>
-                <a:ext uri="{FF2B5EF4-FFF2-40B4-BE49-F238E27FC236}">
-                  <a16:creationId xmlns:a16="http://schemas.microsoft.com/office/drawing/2014/main" id="{9C8547F7-FEAC-4F2B-003C-F4D525315B7E}"/>
-                </a:ext>
-              </a:extLst>
-            </p:cNvPr>
-            <p:cNvSpPr/>
-            <p:nvPr/>
-          </p:nvSpPr>
-          <p:spPr>
-            <a:xfrm>
-              <a:off x="4092396" y="3608293"/>
-              <a:ext cx="304800" cy="304800"/>
-            </a:xfrm>
-            <a:prstGeom prst="rect">
-              <a:avLst/>
-            </a:prstGeom>
-            <a:grpFill/>
-            <a:ln>
-              <a:noFill/>
-            </a:ln>
-          </p:spPr>
-          <p:style>
-            <a:lnRef idx="2">
-              <a:schemeClr val="accent1">
-                <a:shade val="15000"/>
-              </a:schemeClr>
-            </a:lnRef>
-            <a:fillRef idx="1">
-              <a:schemeClr val="accent1"/>
-            </a:fillRef>
-            <a:effectRef idx="0">
-              <a:schemeClr val="accent1"/>
-            </a:effectRef>
-            <a:fontRef idx="minor">
-              <a:schemeClr val="lt1"/>
-            </a:fontRef>
-          </p:style>
-          <p:txBody>
-            <a:bodyPr rtlCol="0" anchor="ctr"/>
-            <a:lstStyle/>
-            <a:p>
-              <a:pPr algn="ctr"/>
-              <a:endParaRPr lang="en-US" sz="2000" b="1"/>
-            </a:p>
-          </p:txBody>
-        </p:sp>
-      </p:grpSp>
-      <p:cxnSp>
-        <p:nvCxnSpPr>
-          <p:cNvPr id="460" name="Straight Arrow Connector 459">
-            <a:extLst>
-              <a:ext uri="{FF2B5EF4-FFF2-40B4-BE49-F238E27FC236}">
-                <a16:creationId xmlns:a16="http://schemas.microsoft.com/office/drawing/2014/main" id="{970B2A50-C802-B07B-396F-752D14FA552B}"/>
-              </a:ext>
-            </a:extLst>
-          </p:cNvPr>
-          <p:cNvCxnSpPr>
-            <a:cxnSpLocks/>
-            <a:stCxn id="279" idx="6"/>
-            <a:endCxn id="451" idx="1"/>
-          </p:cNvCxnSpPr>
-          <p:nvPr/>
-        </p:nvCxnSpPr>
-        <p:spPr>
-          <a:xfrm>
-            <a:off x="7300842" y="3612577"/>
-            <a:ext cx="344615" cy="3387"/>
-          </a:xfrm>
-          <a:prstGeom prst="straightConnector1">
-            <a:avLst/>
-          </a:prstGeom>
-          <a:ln w="28575">
-            <a:solidFill>
-              <a:schemeClr val="tx1"/>
-            </a:solidFill>
-            <a:tailEnd type="triangle"/>
-          </a:ln>
-        </p:spPr>
-        <p:style>
-          <a:lnRef idx="1">
-            <a:schemeClr val="dk1"/>
-          </a:lnRef>
-          <a:fillRef idx="0">
-            <a:schemeClr val="dk1"/>
-          </a:fillRef>
-          <a:effectRef idx="0">
-            <a:schemeClr val="dk1"/>
-          </a:effectRef>
-          <a:fontRef idx="minor">
-            <a:schemeClr val="tx1"/>
-          </a:fontRef>
-        </p:style>
-      </p:cxnSp>
-      <p:cxnSp>
-        <p:nvCxnSpPr>
-          <p:cNvPr id="463" name="Straight Arrow Connector 462">
-            <a:extLst>
-              <a:ext uri="{FF2B5EF4-FFF2-40B4-BE49-F238E27FC236}">
-                <a16:creationId xmlns:a16="http://schemas.microsoft.com/office/drawing/2014/main" id="{20FEBFB4-3276-7CC6-49C2-A392C7E96D1B}"/>
-              </a:ext>
-            </a:extLst>
-          </p:cNvPr>
-          <p:cNvCxnSpPr>
-            <a:cxnSpLocks/>
-            <a:stCxn id="280" idx="6"/>
-            <a:endCxn id="452" idx="1"/>
-          </p:cNvCxnSpPr>
-          <p:nvPr/>
-        </p:nvCxnSpPr>
-        <p:spPr>
-          <a:xfrm>
-            <a:off x="7300842" y="4090467"/>
-            <a:ext cx="344615" cy="3387"/>
-          </a:xfrm>
-          <a:prstGeom prst="straightConnector1">
-            <a:avLst/>
-          </a:prstGeom>
-          <a:ln w="28575">
-            <a:solidFill>
-              <a:schemeClr val="tx1"/>
-            </a:solidFill>
-            <a:tailEnd type="triangle"/>
-          </a:ln>
-        </p:spPr>
-        <p:style>
-          <a:lnRef idx="1">
-            <a:schemeClr val="dk1"/>
-          </a:lnRef>
-          <a:fillRef idx="0">
-            <a:schemeClr val="dk1"/>
-          </a:fillRef>
-          <a:effectRef idx="0">
-            <a:schemeClr val="dk1"/>
-          </a:effectRef>
-          <a:fontRef idx="minor">
-            <a:schemeClr val="tx1"/>
-          </a:fontRef>
-        </p:style>
-      </p:cxnSp>
-      <p:cxnSp>
-        <p:nvCxnSpPr>
-          <p:cNvPr id="466" name="Straight Arrow Connector 465">
-            <a:extLst>
-              <a:ext uri="{FF2B5EF4-FFF2-40B4-BE49-F238E27FC236}">
-                <a16:creationId xmlns:a16="http://schemas.microsoft.com/office/drawing/2014/main" id="{C117E4E3-907E-6A7D-4536-525743D21A7D}"/>
-              </a:ext>
-            </a:extLst>
-          </p:cNvPr>
-          <p:cNvCxnSpPr>
-            <a:cxnSpLocks/>
-            <a:stCxn id="281" idx="6"/>
-            <a:endCxn id="453" idx="1"/>
-          </p:cNvCxnSpPr>
-          <p:nvPr/>
-        </p:nvCxnSpPr>
-        <p:spPr>
-          <a:xfrm>
-            <a:off x="7300842" y="4563333"/>
-            <a:ext cx="344615" cy="8410"/>
-          </a:xfrm>
-          <a:prstGeom prst="straightConnector1">
-            <a:avLst/>
-          </a:prstGeom>
-          <a:ln w="28575">
-            <a:solidFill>
-              <a:schemeClr val="tx1"/>
-            </a:solidFill>
-            <a:tailEnd type="triangle"/>
-          </a:ln>
-        </p:spPr>
-        <p:style>
-          <a:lnRef idx="1">
-            <a:schemeClr val="dk1"/>
-          </a:lnRef>
-          <a:fillRef idx="0">
-            <a:schemeClr val="dk1"/>
-          </a:fillRef>
-          <a:effectRef idx="0">
-            <a:schemeClr val="dk1"/>
-          </a:effectRef>
-          <a:fontRef idx="minor">
-            <a:schemeClr val="tx1"/>
-          </a:fontRef>
-        </p:style>
-      </p:cxnSp>
-      <p:cxnSp>
-        <p:nvCxnSpPr>
-          <p:cNvPr id="469" name="Straight Arrow Connector 468">
-            <a:extLst>
-              <a:ext uri="{FF2B5EF4-FFF2-40B4-BE49-F238E27FC236}">
-                <a16:creationId xmlns:a16="http://schemas.microsoft.com/office/drawing/2014/main" id="{AE6E01C8-C9CF-FC67-D0B4-01D4EB6AC6D8}"/>
-              </a:ext>
-            </a:extLst>
-          </p:cNvPr>
-          <p:cNvCxnSpPr>
-            <a:cxnSpLocks/>
-            <a:stCxn id="283" idx="6"/>
-            <a:endCxn id="454" idx="1"/>
-          </p:cNvCxnSpPr>
-          <p:nvPr/>
-        </p:nvCxnSpPr>
-        <p:spPr>
-          <a:xfrm>
-            <a:off x="7300842" y="5041222"/>
-            <a:ext cx="344615" cy="8411"/>
-          </a:xfrm>
-          <a:prstGeom prst="straightConnector1">
-            <a:avLst/>
-          </a:prstGeom>
-          <a:ln w="28575">
-            <a:solidFill>
-              <a:schemeClr val="tx1"/>
-            </a:solidFill>
-            <a:tailEnd type="triangle"/>
-          </a:ln>
-        </p:spPr>
-        <p:style>
-          <a:lnRef idx="1">
-            <a:schemeClr val="dk1"/>
-          </a:lnRef>
-          <a:fillRef idx="0">
-            <a:schemeClr val="dk1"/>
-          </a:fillRef>
-          <a:effectRef idx="0">
-            <a:schemeClr val="dk1"/>
-          </a:effectRef>
-          <a:fontRef idx="minor">
-            <a:schemeClr val="tx1"/>
-          </a:fontRef>
-        </p:style>
-      </p:cxnSp>
-      <p:grpSp>
-        <p:nvGrpSpPr>
-          <p:cNvPr id="472" name="Group 471">
-            <a:extLst>
-              <a:ext uri="{FF2B5EF4-FFF2-40B4-BE49-F238E27FC236}">
-                <a16:creationId xmlns:a16="http://schemas.microsoft.com/office/drawing/2014/main" id="{A59CB9D1-F27B-881F-9493-7700BA54E211}"/>
-              </a:ext>
-            </a:extLst>
-          </p:cNvPr>
-          <p:cNvGrpSpPr/>
-          <p:nvPr/>
-        </p:nvGrpSpPr>
-        <p:grpSpPr>
-          <a:xfrm>
-            <a:off x="8157784" y="3437411"/>
-            <a:ext cx="1342879" cy="2333957"/>
-            <a:chOff x="3263434" y="2384611"/>
-            <a:chExt cx="1219201" cy="1992106"/>
-          </a:xfrm>
-        </p:grpSpPr>
-        <p:sp>
-          <p:nvSpPr>
-            <p:cNvPr id="473" name="Oval 472">
-              <a:extLst>
-                <a:ext uri="{FF2B5EF4-FFF2-40B4-BE49-F238E27FC236}">
-                  <a16:creationId xmlns:a16="http://schemas.microsoft.com/office/drawing/2014/main" id="{FF8B34A2-B088-BC7C-36C0-BD744CBDF76A}"/>
-                </a:ext>
-              </a:extLst>
-            </p:cNvPr>
-            <p:cNvSpPr/>
-            <p:nvPr/>
-          </p:nvSpPr>
-          <p:spPr>
-            <a:xfrm>
-              <a:off x="3294535" y="2384611"/>
-              <a:ext cx="304800" cy="304800"/>
-            </a:xfrm>
-            <a:prstGeom prst="ellipse">
-              <a:avLst/>
-            </a:prstGeom>
-            <a:solidFill>
-              <a:schemeClr val="accent6">
-                <a:lumMod val="50000"/>
-              </a:schemeClr>
-            </a:solidFill>
-            <a:ln>
-              <a:noFill/>
-            </a:ln>
-          </p:spPr>
-          <p:style>
-            <a:lnRef idx="2">
-              <a:schemeClr val="accent1">
-                <a:shade val="15000"/>
-              </a:schemeClr>
-            </a:lnRef>
-            <a:fillRef idx="1">
-              <a:schemeClr val="accent1"/>
-            </a:fillRef>
-            <a:effectRef idx="0">
-              <a:schemeClr val="accent1"/>
-            </a:effectRef>
-            <a:fontRef idx="minor">
-              <a:schemeClr val="lt1"/>
-            </a:fontRef>
-          </p:style>
-          <p:txBody>
-            <a:bodyPr rtlCol="0" anchor="ctr"/>
-            <a:lstStyle/>
-            <a:p>
-              <a:pPr algn="ctr"/>
-              <a:endParaRPr lang="en-US" sz="2000" b="1"/>
-            </a:p>
-          </p:txBody>
-        </p:sp>
-        <p:sp>
-          <p:nvSpPr>
-            <p:cNvPr id="474" name="Oval 473">
-              <a:extLst>
-                <a:ext uri="{FF2B5EF4-FFF2-40B4-BE49-F238E27FC236}">
-                  <a16:creationId xmlns:a16="http://schemas.microsoft.com/office/drawing/2014/main" id="{6C636A05-6E22-D277-D61F-31F62D051311}"/>
-                </a:ext>
-              </a:extLst>
-            </p:cNvPr>
-            <p:cNvSpPr/>
-            <p:nvPr/>
-          </p:nvSpPr>
-          <p:spPr>
-            <a:xfrm>
-              <a:off x="3294535" y="2792505"/>
-              <a:ext cx="304800" cy="304800"/>
-            </a:xfrm>
-            <a:prstGeom prst="ellipse">
-              <a:avLst/>
-            </a:prstGeom>
-            <a:solidFill>
-              <a:schemeClr val="accent6">
-                <a:lumMod val="50000"/>
-              </a:schemeClr>
-            </a:solidFill>
-            <a:ln>
-              <a:noFill/>
-            </a:ln>
-          </p:spPr>
-          <p:style>
-            <a:lnRef idx="2">
-              <a:schemeClr val="accent1">
-                <a:shade val="15000"/>
-              </a:schemeClr>
-            </a:lnRef>
-            <a:fillRef idx="1">
-              <a:schemeClr val="accent1"/>
-            </a:fillRef>
-            <a:effectRef idx="0">
-              <a:schemeClr val="accent1"/>
-            </a:effectRef>
-            <a:fontRef idx="minor">
-              <a:schemeClr val="lt1"/>
-            </a:fontRef>
-          </p:style>
-          <p:txBody>
-            <a:bodyPr rtlCol="0" anchor="ctr"/>
-            <a:lstStyle/>
-            <a:p>
-              <a:pPr algn="ctr"/>
-              <a:endParaRPr lang="en-US" sz="2000" b="1"/>
-            </a:p>
-          </p:txBody>
-        </p:sp>
-        <p:sp>
-          <p:nvSpPr>
-            <p:cNvPr id="475" name="Oval 474">
-              <a:extLst>
-                <a:ext uri="{FF2B5EF4-FFF2-40B4-BE49-F238E27FC236}">
-                  <a16:creationId xmlns:a16="http://schemas.microsoft.com/office/drawing/2014/main" id="{DB2F7137-948C-1A5C-3C5C-F2DEF37DDB2E}"/>
-                </a:ext>
-              </a:extLst>
-            </p:cNvPr>
-            <p:cNvSpPr/>
-            <p:nvPr/>
-          </p:nvSpPr>
-          <p:spPr>
-            <a:xfrm>
-              <a:off x="3294535" y="3200399"/>
-              <a:ext cx="304800" cy="304800"/>
-            </a:xfrm>
-            <a:prstGeom prst="ellipse">
-              <a:avLst/>
-            </a:prstGeom>
-            <a:solidFill>
-              <a:schemeClr val="accent6">
-                <a:lumMod val="50000"/>
-              </a:schemeClr>
-            </a:solidFill>
-            <a:ln>
-              <a:noFill/>
-            </a:ln>
-          </p:spPr>
-          <p:style>
-            <a:lnRef idx="2">
-              <a:schemeClr val="accent1">
-                <a:shade val="15000"/>
-              </a:schemeClr>
-            </a:lnRef>
-            <a:fillRef idx="1">
-              <a:schemeClr val="accent1"/>
-            </a:fillRef>
-            <a:effectRef idx="0">
-              <a:schemeClr val="accent1"/>
-            </a:effectRef>
-            <a:fontRef idx="minor">
-              <a:schemeClr val="lt1"/>
-            </a:fontRef>
-          </p:style>
-          <p:txBody>
-            <a:bodyPr rtlCol="0" anchor="ctr"/>
-            <a:lstStyle/>
-            <a:p>
-              <a:pPr algn="ctr"/>
-              <a:endParaRPr lang="en-US" sz="2000" b="1"/>
-            </a:p>
-          </p:txBody>
-        </p:sp>
-        <p:grpSp>
-          <p:nvGrpSpPr>
-            <p:cNvPr id="476" name="Group 475">
-              <a:extLst>
-                <a:ext uri="{FF2B5EF4-FFF2-40B4-BE49-F238E27FC236}">
-                  <a16:creationId xmlns:a16="http://schemas.microsoft.com/office/drawing/2014/main" id="{9DF296A0-9730-1E32-86BE-4381F37C0CCC}"/>
-                </a:ext>
-              </a:extLst>
-            </p:cNvPr>
-            <p:cNvGrpSpPr/>
-            <p:nvPr/>
-          </p:nvGrpSpPr>
-          <p:grpSpPr>
-            <a:xfrm>
-              <a:off x="3263434" y="3608293"/>
-              <a:ext cx="1219201" cy="768424"/>
-              <a:chOff x="3263434" y="3608293"/>
-              <a:chExt cx="1219201" cy="768424"/>
-            </a:xfrm>
-          </p:grpSpPr>
-          <p:sp>
-            <p:nvSpPr>
-              <p:cNvPr id="477" name="Oval 476">
-                <a:extLst>
-                  <a:ext uri="{FF2B5EF4-FFF2-40B4-BE49-F238E27FC236}">
-                    <a16:creationId xmlns:a16="http://schemas.microsoft.com/office/drawing/2014/main" id="{33AA2081-13A3-B32B-FCF8-DB09298F984C}"/>
-                  </a:ext>
-                </a:extLst>
-              </p:cNvPr>
-              <p:cNvSpPr/>
-              <p:nvPr/>
-            </p:nvSpPr>
-            <p:spPr>
-              <a:xfrm>
-                <a:off x="3294535" y="3608293"/>
-                <a:ext cx="304800" cy="304800"/>
-              </a:xfrm>
-              <a:prstGeom prst="ellipse">
-                <a:avLst/>
-              </a:prstGeom>
-              <a:solidFill>
-                <a:schemeClr val="accent6">
-                  <a:lumMod val="50000"/>
-                </a:schemeClr>
-              </a:solidFill>
-              <a:ln>
-                <a:noFill/>
-              </a:ln>
-            </p:spPr>
-            <p:style>
-              <a:lnRef idx="2">
-                <a:schemeClr val="accent1">
-                  <a:shade val="15000"/>
-                </a:schemeClr>
-              </a:lnRef>
-              <a:fillRef idx="1">
-                <a:schemeClr val="accent1"/>
-              </a:fillRef>
-              <a:effectRef idx="0">
-                <a:schemeClr val="accent1"/>
-              </a:effectRef>
-              <a:fontRef idx="minor">
-                <a:schemeClr val="lt1"/>
-              </a:fontRef>
-            </p:style>
-            <p:txBody>
-              <a:bodyPr rtlCol="0" anchor="ctr"/>
-              <a:lstStyle/>
-              <a:p>
-                <a:pPr algn="ctr"/>
-                <a:endParaRPr lang="en-US" sz="2000" b="1"/>
-              </a:p>
-            </p:txBody>
-          </p:sp>
-          <p:sp>
-            <p:nvSpPr>
-              <p:cNvPr id="478" name="TextBox 477">
-                <a:extLst>
-                  <a:ext uri="{FF2B5EF4-FFF2-40B4-BE49-F238E27FC236}">
-                    <a16:creationId xmlns:a16="http://schemas.microsoft.com/office/drawing/2014/main" id="{64B0D9A0-D8CB-E168-9FFD-5A7FD12CE72B}"/>
-                  </a:ext>
-                </a:extLst>
-              </p:cNvPr>
-              <p:cNvSpPr txBox="1"/>
-              <p:nvPr/>
-            </p:nvSpPr>
-            <p:spPr>
-              <a:xfrm>
-                <a:off x="3263434" y="4035211"/>
-                <a:ext cx="1219201" cy="341506"/>
-              </a:xfrm>
-              <a:prstGeom prst="rect">
-                <a:avLst/>
-              </a:prstGeom>
-              <a:noFill/>
-            </p:spPr>
-            <p:txBody>
-              <a:bodyPr wrap="square" rtlCol="0">
-                <a:spAutoFit/>
-              </a:bodyPr>
-              <a:lstStyle/>
-              <a:p>
-                <a:pPr algn="ctr"/>
-                <a:r>
-                  <a:rPr lang="en-US" sz="2000" b="1" dirty="0">
-                    <a:solidFill>
-                      <a:schemeClr val="accent6">
-                        <a:lumMod val="50000"/>
-                      </a:schemeClr>
-                    </a:solidFill>
-                  </a:rPr>
-                  <a:t>speed</a:t>
-                </a:r>
-              </a:p>
-            </p:txBody>
-          </p:sp>
-          <p:cxnSp>
-            <p:nvCxnSpPr>
-              <p:cNvPr id="479" name="Straight Connector 478">
-                <a:extLst>
-                  <a:ext uri="{FF2B5EF4-FFF2-40B4-BE49-F238E27FC236}">
-                    <a16:creationId xmlns:a16="http://schemas.microsoft.com/office/drawing/2014/main" id="{CACD5795-C52E-3562-C651-947724CED72F}"/>
-                  </a:ext>
-                </a:extLst>
-              </p:cNvPr>
-              <p:cNvCxnSpPr>
-                <a:cxnSpLocks/>
-                <a:stCxn id="478" idx="0"/>
-                <a:endCxn id="477" idx="4"/>
-              </p:cNvCxnSpPr>
-              <p:nvPr/>
-            </p:nvCxnSpPr>
-            <p:spPr>
-              <a:xfrm flipH="1" flipV="1">
-                <a:off x="3446935" y="3913093"/>
-                <a:ext cx="426100" cy="122117"/>
-              </a:xfrm>
-              <a:prstGeom prst="line">
-                <a:avLst/>
-              </a:prstGeom>
-              <a:ln w="12700"/>
-            </p:spPr>
-            <p:style>
-              <a:lnRef idx="1">
-                <a:schemeClr val="dk1"/>
-              </a:lnRef>
-              <a:fillRef idx="0">
-                <a:schemeClr val="dk1"/>
-              </a:fillRef>
-              <a:effectRef idx="0">
-                <a:schemeClr val="dk1"/>
-              </a:effectRef>
-              <a:fontRef idx="minor">
-                <a:schemeClr val="tx1"/>
-              </a:fontRef>
-            </p:style>
-          </p:cxnSp>
-        </p:grpSp>
-      </p:grpSp>
-      <p:cxnSp>
-        <p:nvCxnSpPr>
-          <p:cNvPr id="483" name="Straight Arrow Connector 482">
-            <a:extLst>
-              <a:ext uri="{FF2B5EF4-FFF2-40B4-BE49-F238E27FC236}">
-                <a16:creationId xmlns:a16="http://schemas.microsoft.com/office/drawing/2014/main" id="{6FB005C3-32BA-5894-9F30-ACCCAF5006B9}"/>
-              </a:ext>
-            </a:extLst>
-          </p:cNvPr>
-          <p:cNvCxnSpPr>
-            <a:cxnSpLocks/>
-            <a:stCxn id="451" idx="3"/>
-            <a:endCxn id="473" idx="2"/>
-          </p:cNvCxnSpPr>
-          <p:nvPr/>
-        </p:nvCxnSpPr>
-        <p:spPr>
-          <a:xfrm>
-            <a:off x="7865382" y="3615964"/>
-            <a:ext cx="326658" cy="0"/>
-          </a:xfrm>
-          <a:prstGeom prst="straightConnector1">
-            <a:avLst/>
-          </a:prstGeom>
-          <a:ln w="28575">
-            <a:solidFill>
-              <a:schemeClr val="tx1"/>
-            </a:solidFill>
-            <a:tailEnd type="triangle"/>
-          </a:ln>
-        </p:spPr>
-        <p:style>
-          <a:lnRef idx="1">
-            <a:schemeClr val="dk1"/>
-          </a:lnRef>
-          <a:fillRef idx="0">
-            <a:schemeClr val="dk1"/>
-          </a:fillRef>
-          <a:effectRef idx="0">
-            <a:schemeClr val="dk1"/>
-          </a:effectRef>
-          <a:fontRef idx="minor">
-            <a:schemeClr val="tx1"/>
-          </a:fontRef>
-        </p:style>
-      </p:cxnSp>
-      <p:cxnSp>
-        <p:nvCxnSpPr>
-          <p:cNvPr id="486" name="Straight Arrow Connector 485">
-            <a:extLst>
-              <a:ext uri="{FF2B5EF4-FFF2-40B4-BE49-F238E27FC236}">
-                <a16:creationId xmlns:a16="http://schemas.microsoft.com/office/drawing/2014/main" id="{24365360-BD0C-E7E9-A2E4-AD61DE3F7DBF}"/>
-              </a:ext>
-            </a:extLst>
-          </p:cNvPr>
-          <p:cNvCxnSpPr>
-            <a:cxnSpLocks/>
-            <a:stCxn id="452" idx="3"/>
-            <a:endCxn id="474" idx="2"/>
-          </p:cNvCxnSpPr>
-          <p:nvPr/>
-        </p:nvCxnSpPr>
-        <p:spPr>
-          <a:xfrm>
-            <a:off x="7865382" y="4093854"/>
-            <a:ext cx="326658" cy="0"/>
-          </a:xfrm>
-          <a:prstGeom prst="straightConnector1">
-            <a:avLst/>
-          </a:prstGeom>
-          <a:ln w="28575">
-            <a:solidFill>
-              <a:schemeClr val="tx1"/>
-            </a:solidFill>
-            <a:tailEnd type="triangle"/>
-          </a:ln>
-        </p:spPr>
-        <p:style>
-          <a:lnRef idx="1">
-            <a:schemeClr val="dk1"/>
-          </a:lnRef>
-          <a:fillRef idx="0">
-            <a:schemeClr val="dk1"/>
-          </a:fillRef>
-          <a:effectRef idx="0">
-            <a:schemeClr val="dk1"/>
-          </a:effectRef>
-          <a:fontRef idx="minor">
-            <a:schemeClr val="tx1"/>
-          </a:fontRef>
-        </p:style>
-      </p:cxnSp>
-      <p:cxnSp>
-        <p:nvCxnSpPr>
-          <p:cNvPr id="489" name="Straight Arrow Connector 488">
-            <a:extLst>
-              <a:ext uri="{FF2B5EF4-FFF2-40B4-BE49-F238E27FC236}">
-                <a16:creationId xmlns:a16="http://schemas.microsoft.com/office/drawing/2014/main" id="{8D762FAB-9E62-043F-5360-4086CE408A3E}"/>
-              </a:ext>
-            </a:extLst>
-          </p:cNvPr>
-          <p:cNvCxnSpPr>
-            <a:cxnSpLocks/>
-            <a:stCxn id="453" idx="3"/>
-            <a:endCxn id="475" idx="2"/>
-          </p:cNvCxnSpPr>
-          <p:nvPr/>
-        </p:nvCxnSpPr>
-        <p:spPr>
-          <a:xfrm>
-            <a:off x="7865382" y="4571743"/>
-            <a:ext cx="326658" cy="1"/>
-          </a:xfrm>
-          <a:prstGeom prst="straightConnector1">
-            <a:avLst/>
-          </a:prstGeom>
-          <a:ln w="28575">
-            <a:solidFill>
-              <a:schemeClr val="tx1"/>
-            </a:solidFill>
-            <a:tailEnd type="triangle"/>
-          </a:ln>
-        </p:spPr>
-        <p:style>
-          <a:lnRef idx="1">
-            <a:schemeClr val="dk1"/>
-          </a:lnRef>
-          <a:fillRef idx="0">
-            <a:schemeClr val="dk1"/>
-          </a:fillRef>
-          <a:effectRef idx="0">
-            <a:schemeClr val="dk1"/>
-          </a:effectRef>
-          <a:fontRef idx="minor">
-            <a:schemeClr val="tx1"/>
-          </a:fontRef>
-        </p:style>
-      </p:cxnSp>
-      <p:cxnSp>
-        <p:nvCxnSpPr>
-          <p:cNvPr id="492" name="Straight Arrow Connector 491">
-            <a:extLst>
-              <a:ext uri="{FF2B5EF4-FFF2-40B4-BE49-F238E27FC236}">
-                <a16:creationId xmlns:a16="http://schemas.microsoft.com/office/drawing/2014/main" id="{2287667C-EAFD-2842-4F38-E96B68FA712B}"/>
-              </a:ext>
-            </a:extLst>
-          </p:cNvPr>
-          <p:cNvCxnSpPr>
-            <a:cxnSpLocks/>
-            <a:stCxn id="454" idx="3"/>
-            <a:endCxn id="477" idx="2"/>
-          </p:cNvCxnSpPr>
-          <p:nvPr/>
-        </p:nvCxnSpPr>
-        <p:spPr>
-          <a:xfrm>
-            <a:off x="7865382" y="5049633"/>
-            <a:ext cx="326658" cy="0"/>
-          </a:xfrm>
-          <a:prstGeom prst="straightConnector1">
-            <a:avLst/>
-          </a:prstGeom>
-          <a:ln w="28575">
-            <a:solidFill>
-              <a:schemeClr val="tx1"/>
-            </a:solidFill>
-            <a:tailEnd type="triangle"/>
-          </a:ln>
-        </p:spPr>
-        <p:style>
-          <a:lnRef idx="1">
-            <a:schemeClr val="dk1"/>
-          </a:lnRef>
-          <a:fillRef idx="0">
-            <a:schemeClr val="dk1"/>
-          </a:fillRef>
-          <a:effectRef idx="0">
-            <a:schemeClr val="dk1"/>
-          </a:effectRef>
-          <a:fontRef idx="minor">
-            <a:schemeClr val="tx1"/>
-          </a:fontRef>
-        </p:style>
-      </p:cxnSp>
-      <p:sp>
-        <p:nvSpPr>
-          <p:cNvPr id="499" name="Rectangle 498">
-            <a:extLst>
-              <a:ext uri="{FF2B5EF4-FFF2-40B4-BE49-F238E27FC236}">
-                <a16:creationId xmlns:a16="http://schemas.microsoft.com/office/drawing/2014/main" id="{EA7E6A4F-CB1D-85EE-8E67-29ACF94CFBA2}"/>
-              </a:ext>
-            </a:extLst>
-          </p:cNvPr>
-          <p:cNvSpPr/>
-          <p:nvPr/>
-        </p:nvSpPr>
-        <p:spPr>
-          <a:xfrm>
-            <a:off x="8999861" y="3979299"/>
-            <a:ext cx="211501" cy="357105"/>
-          </a:xfrm>
-          <a:prstGeom prst="rect">
-            <a:avLst/>
-          </a:prstGeom>
-          <a:solidFill>
-            <a:srgbClr val="00B0F0"/>
-          </a:solidFill>
-          <a:ln>
-            <a:noFill/>
-          </a:ln>
-        </p:spPr>
-        <p:style>
-          <a:lnRef idx="2">
-            <a:schemeClr val="accent1">
-              <a:shade val="15000"/>
-            </a:schemeClr>
-          </a:lnRef>
-          <a:fillRef idx="1">
-            <a:schemeClr val="accent1"/>
-          </a:fillRef>
-          <a:effectRef idx="0">
-            <a:schemeClr val="accent1"/>
-          </a:effectRef>
-          <a:fontRef idx="minor">
-            <a:schemeClr val="lt1"/>
-          </a:fontRef>
-        </p:style>
-        <p:txBody>
-          <a:bodyPr rtlCol="0" anchor="ctr"/>
-          <a:lstStyle/>
-          <a:p>
-            <a:pPr algn="ctr"/>
-            <a:endParaRPr lang="en-US" sz="2000" b="1"/>
-          </a:p>
-        </p:txBody>
-      </p:sp>
-      <p:cxnSp>
-        <p:nvCxnSpPr>
-          <p:cNvPr id="503" name="Straight Arrow Connector 502">
-            <a:extLst>
-              <a:ext uri="{FF2B5EF4-FFF2-40B4-BE49-F238E27FC236}">
-                <a16:creationId xmlns:a16="http://schemas.microsoft.com/office/drawing/2014/main" id="{C872770E-3A9E-2EE5-8A7E-FAB0D0B14971}"/>
-              </a:ext>
-            </a:extLst>
-          </p:cNvPr>
-          <p:cNvCxnSpPr>
-            <a:cxnSpLocks/>
-            <a:stCxn id="474" idx="6"/>
-            <a:endCxn id="499" idx="1"/>
-          </p:cNvCxnSpPr>
-          <p:nvPr/>
-        </p:nvCxnSpPr>
-        <p:spPr>
-          <a:xfrm>
-            <a:off x="8527759" y="4093854"/>
-            <a:ext cx="472102" cy="63998"/>
-          </a:xfrm>
-          <a:prstGeom prst="straightConnector1">
-            <a:avLst/>
-          </a:prstGeom>
-          <a:ln w="28575">
-            <a:solidFill>
-              <a:schemeClr val="tx1"/>
-            </a:solidFill>
-            <a:tailEnd type="triangle"/>
-          </a:ln>
-        </p:spPr>
-        <p:style>
-          <a:lnRef idx="1">
-            <a:schemeClr val="dk1"/>
-          </a:lnRef>
-          <a:fillRef idx="0">
-            <a:schemeClr val="dk1"/>
-          </a:fillRef>
-          <a:effectRef idx="0">
-            <a:schemeClr val="dk1"/>
-          </a:effectRef>
-          <a:fontRef idx="minor">
-            <a:schemeClr val="tx1"/>
-          </a:fontRef>
-        </p:style>
-      </p:cxnSp>
-      <p:grpSp>
-        <p:nvGrpSpPr>
           <p:cNvPr id="508" name="Group 507">
             <a:extLst>
               <a:ext uri="{FF2B5EF4-FFF2-40B4-BE49-F238E27FC236}">
@@ -4578,10 +3547,10 @@
         </p:nvGrpSpPr>
         <p:grpSpPr>
           <a:xfrm>
-            <a:off x="144932" y="84963"/>
-            <a:ext cx="2652589" cy="2976006"/>
-            <a:chOff x="207818" y="1793422"/>
-            <a:chExt cx="2652589" cy="2976006"/>
+            <a:off x="147877" y="267592"/>
+            <a:ext cx="2652589" cy="2799553"/>
+            <a:chOff x="207818" y="1884862"/>
+            <a:chExt cx="2652589" cy="2799553"/>
           </a:xfrm>
         </p:grpSpPr>
         <p:grpSp>
@@ -5026,10 +3995,10 @@
           </p:nvGrpSpPr>
           <p:grpSpPr>
             <a:xfrm>
-              <a:off x="311726" y="2211418"/>
-              <a:ext cx="1482436" cy="2462076"/>
-              <a:chOff x="1299468" y="2384611"/>
-              <a:chExt cx="1291872" cy="2101461"/>
+              <a:off x="253537" y="2211418"/>
+              <a:ext cx="1482436" cy="2420512"/>
+              <a:chOff x="1248759" y="2384611"/>
+              <a:chExt cx="1291872" cy="2065985"/>
             </a:xfrm>
           </p:grpSpPr>
           <p:sp>
@@ -5202,10 +4171,10 @@
             </p:nvGrpSpPr>
             <p:grpSpPr>
               <a:xfrm>
-                <a:off x="1299468" y="3608293"/>
-                <a:ext cx="1291872" cy="877779"/>
-                <a:chOff x="1299468" y="3608293"/>
-                <a:chExt cx="1291872" cy="877779"/>
+                <a:off x="1248759" y="3608293"/>
+                <a:ext cx="1291872" cy="842303"/>
+                <a:chOff x="1248759" y="3608293"/>
+                <a:chExt cx="1291872" cy="842303"/>
               </a:xfrm>
             </p:grpSpPr>
             <p:sp>
@@ -5274,7 +4243,7 @@
               </p:nvSpPr>
               <p:spPr>
                 <a:xfrm>
-                  <a:off x="1299468" y="4197105"/>
+                  <a:off x="1248759" y="4161629"/>
                   <a:ext cx="1291872" cy="288967"/>
                 </a:xfrm>
                 <a:prstGeom prst="rect">
@@ -5327,7 +4296,7 @@
               <p:spPr>
                 <a:xfrm flipH="1" flipV="1">
                   <a:off x="1805937" y="3913093"/>
-                  <a:ext cx="139467" cy="284013"/>
+                  <a:ext cx="88758" cy="248537"/>
                 </a:xfrm>
                 <a:prstGeom prst="line">
                   <a:avLst/>
@@ -6918,8 +5887,8 @@
           </p:nvSpPr>
           <p:spPr>
             <a:xfrm>
-              <a:off x="207818" y="1806572"/>
-              <a:ext cx="2464558" cy="2962856"/>
+              <a:off x="207818" y="1924590"/>
+              <a:ext cx="2464558" cy="2759825"/>
             </a:xfrm>
             <a:prstGeom prst="roundRect">
               <a:avLst/>
@@ -7012,7 +5981,7 @@
           </p:nvSpPr>
           <p:spPr>
             <a:xfrm>
-              <a:off x="1030572" y="1793422"/>
+              <a:off x="1737154" y="1884862"/>
               <a:ext cx="941533" cy="369332"/>
             </a:xfrm>
             <a:prstGeom prst="rect">
@@ -10066,7 +9035,7 @@
         </p:nvGrpSpPr>
         <p:grpSpPr>
           <a:xfrm>
-            <a:off x="144932" y="3242623"/>
+            <a:off x="61805" y="3195696"/>
             <a:ext cx="2164649" cy="2549237"/>
             <a:chOff x="292697" y="3265271"/>
             <a:chExt cx="2164649" cy="2549237"/>
@@ -10976,7 +9945,7 @@
         </p:nvGrpSpPr>
         <p:grpSpPr>
           <a:xfrm>
-            <a:off x="2177749" y="3251099"/>
+            <a:off x="2177748" y="3195859"/>
             <a:ext cx="2206226" cy="2549237"/>
             <a:chOff x="2701426" y="3265271"/>
             <a:chExt cx="2206226" cy="2549237"/>
@@ -11729,455 +10698,6 @@
       </p:grpSp>
       <p:grpSp>
         <p:nvGrpSpPr>
-          <p:cNvPr id="278" name="Group 277">
-            <a:extLst>
-              <a:ext uri="{FF2B5EF4-FFF2-40B4-BE49-F238E27FC236}">
-                <a16:creationId xmlns:a16="http://schemas.microsoft.com/office/drawing/2014/main" id="{DF8D0B66-5634-C388-B191-7B960534FF44}"/>
-              </a:ext>
-            </a:extLst>
-          </p:cNvPr>
-          <p:cNvGrpSpPr/>
-          <p:nvPr/>
-        </p:nvGrpSpPr>
-        <p:grpSpPr>
-          <a:xfrm>
-            <a:off x="6743176" y="3434024"/>
-            <a:ext cx="1824865" cy="2294195"/>
-            <a:chOff x="1507528" y="2388899"/>
-            <a:chExt cx="1623354" cy="1958168"/>
-          </a:xfrm>
-        </p:grpSpPr>
-        <p:sp>
-          <p:nvSpPr>
-            <p:cNvPr id="279" name="Oval 278">
-              <a:extLst>
-                <a:ext uri="{FF2B5EF4-FFF2-40B4-BE49-F238E27FC236}">
-                  <a16:creationId xmlns:a16="http://schemas.microsoft.com/office/drawing/2014/main" id="{3E3B8C2C-7E8B-37DE-E21D-45FD24425804}"/>
-                </a:ext>
-              </a:extLst>
-            </p:cNvPr>
-            <p:cNvSpPr/>
-            <p:nvPr/>
-          </p:nvSpPr>
-          <p:spPr>
-            <a:xfrm>
-              <a:off x="1698813" y="2388899"/>
-              <a:ext cx="304800" cy="304800"/>
-            </a:xfrm>
-            <a:prstGeom prst="ellipse">
-              <a:avLst/>
-            </a:prstGeom>
-            <a:solidFill>
-              <a:schemeClr val="accent1">
-                <a:lumMod val="60000"/>
-                <a:lumOff val="40000"/>
-              </a:schemeClr>
-            </a:solidFill>
-            <a:ln>
-              <a:noFill/>
-            </a:ln>
-          </p:spPr>
-          <p:style>
-            <a:lnRef idx="2">
-              <a:schemeClr val="accent1">
-                <a:shade val="15000"/>
-              </a:schemeClr>
-            </a:lnRef>
-            <a:fillRef idx="1">
-              <a:schemeClr val="accent1"/>
-            </a:fillRef>
-            <a:effectRef idx="0">
-              <a:schemeClr val="accent1"/>
-            </a:effectRef>
-            <a:fontRef idx="minor">
-              <a:schemeClr val="lt1"/>
-            </a:fontRef>
-          </p:style>
-          <p:txBody>
-            <a:bodyPr rtlCol="0" anchor="ctr"/>
-            <a:lstStyle/>
-            <a:p>
-              <a:pPr algn="ctr"/>
-              <a:endParaRPr lang="en-US" sz="2000" b="1"/>
-            </a:p>
-          </p:txBody>
-        </p:sp>
-        <p:sp>
-          <p:nvSpPr>
-            <p:cNvPr id="280" name="Oval 279">
-              <a:extLst>
-                <a:ext uri="{FF2B5EF4-FFF2-40B4-BE49-F238E27FC236}">
-                  <a16:creationId xmlns:a16="http://schemas.microsoft.com/office/drawing/2014/main" id="{EAFE00DA-1EE7-88F1-B16D-725ECEF022EB}"/>
-                </a:ext>
-              </a:extLst>
-            </p:cNvPr>
-            <p:cNvSpPr/>
-            <p:nvPr/>
-          </p:nvSpPr>
-          <p:spPr>
-            <a:xfrm>
-              <a:off x="1698813" y="2796793"/>
-              <a:ext cx="304800" cy="304800"/>
-            </a:xfrm>
-            <a:prstGeom prst="ellipse">
-              <a:avLst/>
-            </a:prstGeom>
-            <a:solidFill>
-              <a:schemeClr val="accent1">
-                <a:lumMod val="60000"/>
-                <a:lumOff val="40000"/>
-              </a:schemeClr>
-            </a:solidFill>
-            <a:ln>
-              <a:noFill/>
-            </a:ln>
-          </p:spPr>
-          <p:style>
-            <a:lnRef idx="2">
-              <a:schemeClr val="accent1">
-                <a:shade val="15000"/>
-              </a:schemeClr>
-            </a:lnRef>
-            <a:fillRef idx="1">
-              <a:schemeClr val="accent1"/>
-            </a:fillRef>
-            <a:effectRef idx="0">
-              <a:schemeClr val="accent1"/>
-            </a:effectRef>
-            <a:fontRef idx="minor">
-              <a:schemeClr val="lt1"/>
-            </a:fontRef>
-          </p:style>
-          <p:txBody>
-            <a:bodyPr rtlCol="0" anchor="ctr"/>
-            <a:lstStyle/>
-            <a:p>
-              <a:pPr algn="ctr"/>
-              <a:endParaRPr lang="en-US" sz="2000" b="1"/>
-            </a:p>
-          </p:txBody>
-        </p:sp>
-        <p:sp>
-          <p:nvSpPr>
-            <p:cNvPr id="281" name="Oval 280">
-              <a:extLst>
-                <a:ext uri="{FF2B5EF4-FFF2-40B4-BE49-F238E27FC236}">
-                  <a16:creationId xmlns:a16="http://schemas.microsoft.com/office/drawing/2014/main" id="{B31B8E92-A8E1-CB6F-20A7-379FFDDB3CC3}"/>
-                </a:ext>
-              </a:extLst>
-            </p:cNvPr>
-            <p:cNvSpPr/>
-            <p:nvPr/>
-          </p:nvSpPr>
-          <p:spPr>
-            <a:xfrm>
-              <a:off x="1698813" y="3200399"/>
-              <a:ext cx="304800" cy="304800"/>
-            </a:xfrm>
-            <a:prstGeom prst="ellipse">
-              <a:avLst/>
-            </a:prstGeom>
-            <a:solidFill>
-              <a:schemeClr val="accent1">
-                <a:lumMod val="60000"/>
-                <a:lumOff val="40000"/>
-              </a:schemeClr>
-            </a:solidFill>
-            <a:ln>
-              <a:noFill/>
-            </a:ln>
-          </p:spPr>
-          <p:style>
-            <a:lnRef idx="2">
-              <a:schemeClr val="accent1">
-                <a:shade val="15000"/>
-              </a:schemeClr>
-            </a:lnRef>
-            <a:fillRef idx="1">
-              <a:schemeClr val="accent1"/>
-            </a:fillRef>
-            <a:effectRef idx="0">
-              <a:schemeClr val="accent1"/>
-            </a:effectRef>
-            <a:fontRef idx="minor">
-              <a:schemeClr val="lt1"/>
-            </a:fontRef>
-          </p:style>
-          <p:txBody>
-            <a:bodyPr rtlCol="0" anchor="ctr"/>
-            <a:lstStyle/>
-            <a:p>
-              <a:pPr algn="ctr"/>
-              <a:endParaRPr lang="en-US" sz="2000" b="1"/>
-            </a:p>
-          </p:txBody>
-        </p:sp>
-        <p:grpSp>
-          <p:nvGrpSpPr>
-            <p:cNvPr id="282" name="Group 281">
-              <a:extLst>
-                <a:ext uri="{FF2B5EF4-FFF2-40B4-BE49-F238E27FC236}">
-                  <a16:creationId xmlns:a16="http://schemas.microsoft.com/office/drawing/2014/main" id="{D7E66387-089D-8048-D51C-4A89750A7E25}"/>
-                </a:ext>
-              </a:extLst>
-            </p:cNvPr>
-            <p:cNvGrpSpPr/>
-            <p:nvPr/>
-          </p:nvGrpSpPr>
-          <p:grpSpPr>
-            <a:xfrm>
-              <a:off x="1507528" y="3608293"/>
-              <a:ext cx="1623354" cy="738774"/>
-              <a:chOff x="1507528" y="3608293"/>
-              <a:chExt cx="1623354" cy="738774"/>
-            </a:xfrm>
-          </p:grpSpPr>
-          <p:sp>
-            <p:nvSpPr>
-              <p:cNvPr id="283" name="Oval 282">
-                <a:extLst>
-                  <a:ext uri="{FF2B5EF4-FFF2-40B4-BE49-F238E27FC236}">
-                    <a16:creationId xmlns:a16="http://schemas.microsoft.com/office/drawing/2014/main" id="{87DB7F8C-9EF1-BDB2-C6D3-7BA6339DF0F4}"/>
-                  </a:ext>
-                </a:extLst>
-              </p:cNvPr>
-              <p:cNvSpPr/>
-              <p:nvPr/>
-            </p:nvSpPr>
-            <p:spPr>
-              <a:xfrm>
-                <a:off x="1698813" y="3608293"/>
-                <a:ext cx="304800" cy="304800"/>
-              </a:xfrm>
-              <a:prstGeom prst="ellipse">
-                <a:avLst/>
-              </a:prstGeom>
-              <a:solidFill>
-                <a:schemeClr val="accent1">
-                  <a:lumMod val="60000"/>
-                  <a:lumOff val="40000"/>
-                </a:schemeClr>
-              </a:solidFill>
-              <a:ln>
-                <a:noFill/>
-              </a:ln>
-            </p:spPr>
-            <p:style>
-              <a:lnRef idx="2">
-                <a:schemeClr val="accent1">
-                  <a:shade val="15000"/>
-                </a:schemeClr>
-              </a:lnRef>
-              <a:fillRef idx="1">
-                <a:schemeClr val="accent1"/>
-              </a:fillRef>
-              <a:effectRef idx="0">
-                <a:schemeClr val="accent1"/>
-              </a:effectRef>
-              <a:fontRef idx="minor">
-                <a:schemeClr val="lt1"/>
-              </a:fontRef>
-            </p:style>
-            <p:txBody>
-              <a:bodyPr rtlCol="0" anchor="ctr"/>
-              <a:lstStyle/>
-              <a:p>
-                <a:pPr algn="ctr"/>
-                <a:endParaRPr lang="en-US" sz="2000" b="1"/>
-              </a:p>
-            </p:txBody>
-          </p:sp>
-          <p:sp>
-            <p:nvSpPr>
-              <p:cNvPr id="284" name="TextBox 283">
-                <a:extLst>
-                  <a:ext uri="{FF2B5EF4-FFF2-40B4-BE49-F238E27FC236}">
-                    <a16:creationId xmlns:a16="http://schemas.microsoft.com/office/drawing/2014/main" id="{66AD9E63-02A6-F700-6AE2-2DCF28FFADCB}"/>
-                  </a:ext>
-                </a:extLst>
-              </p:cNvPr>
-              <p:cNvSpPr txBox="1"/>
-              <p:nvPr/>
-            </p:nvSpPr>
-            <p:spPr>
-              <a:xfrm>
-                <a:off x="1507528" y="4058100"/>
-                <a:ext cx="1623354" cy="288967"/>
-              </a:xfrm>
-              <a:prstGeom prst="rect">
-                <a:avLst/>
-              </a:prstGeom>
-              <a:noFill/>
-            </p:spPr>
-            <p:txBody>
-              <a:bodyPr wrap="square" rtlCol="0">
-                <a:spAutoFit/>
-              </a:bodyPr>
-              <a:lstStyle/>
-              <a:p>
-                <a:pPr algn="ctr"/>
-                <a:r>
-                  <a:rPr lang="en-US" sz="1600" b="1" dirty="0" err="1">
-                    <a:solidFill>
-                      <a:schemeClr val="accent1">
-                        <a:lumMod val="60000"/>
-                        <a:lumOff val="40000"/>
-                      </a:schemeClr>
-                    </a:solidFill>
-                  </a:rPr>
-                  <a:t>mapfea</a:t>
-                </a:r>
-                <a:r>
-                  <a:rPr lang="en-US" sz="1600" b="1" dirty="0">
-                    <a:solidFill>
-                      <a:schemeClr val="accent1">
-                        <a:lumMod val="60000"/>
-                        <a:lumOff val="40000"/>
-                      </a:schemeClr>
-                    </a:solidFill>
-                  </a:rPr>
-                  <a:t> (96 tasks)</a:t>
-                </a:r>
-              </a:p>
-            </p:txBody>
-          </p:sp>
-          <p:cxnSp>
-            <p:nvCxnSpPr>
-              <p:cNvPr id="285" name="Straight Connector 284">
-                <a:extLst>
-                  <a:ext uri="{FF2B5EF4-FFF2-40B4-BE49-F238E27FC236}">
-                    <a16:creationId xmlns:a16="http://schemas.microsoft.com/office/drawing/2014/main" id="{A784969C-6D20-9C92-19CA-ADB4C91EFA0E}"/>
-                  </a:ext>
-                </a:extLst>
-              </p:cNvPr>
-              <p:cNvCxnSpPr>
-                <a:cxnSpLocks/>
-                <a:stCxn id="284" idx="0"/>
-                <a:endCxn id="283" idx="4"/>
-              </p:cNvCxnSpPr>
-              <p:nvPr/>
-            </p:nvCxnSpPr>
-            <p:spPr>
-              <a:xfrm flipH="1" flipV="1">
-                <a:off x="1851213" y="3913093"/>
-                <a:ext cx="467992" cy="145006"/>
-              </a:xfrm>
-              <a:prstGeom prst="line">
-                <a:avLst/>
-              </a:prstGeom>
-              <a:ln w="12700"/>
-            </p:spPr>
-            <p:style>
-              <a:lnRef idx="1">
-                <a:schemeClr val="dk1"/>
-              </a:lnRef>
-              <a:fillRef idx="0">
-                <a:schemeClr val="dk1"/>
-              </a:fillRef>
-              <a:effectRef idx="0">
-                <a:schemeClr val="dk1"/>
-              </a:effectRef>
-              <a:fontRef idx="minor">
-                <a:schemeClr val="tx1"/>
-              </a:fontRef>
-            </p:style>
-          </p:cxnSp>
-        </p:grpSp>
-      </p:grpSp>
-      <p:sp>
-        <p:nvSpPr>
-          <p:cNvPr id="373" name="Rectangle: Rounded Corners 372">
-            <a:extLst>
-              <a:ext uri="{FF2B5EF4-FFF2-40B4-BE49-F238E27FC236}">
-                <a16:creationId xmlns:a16="http://schemas.microsoft.com/office/drawing/2014/main" id="{5FE7F037-875D-850F-3DF4-6E4EDB17F130}"/>
-              </a:ext>
-            </a:extLst>
-          </p:cNvPr>
-          <p:cNvSpPr/>
-          <p:nvPr/>
-        </p:nvSpPr>
-        <p:spPr>
-          <a:xfrm>
-            <a:off x="6365525" y="3251099"/>
-            <a:ext cx="2989385" cy="2549237"/>
-          </a:xfrm>
-          <a:prstGeom prst="roundRect">
-            <a:avLst/>
-          </a:prstGeom>
-          <a:noFill/>
-          <a:ln w="28575">
-            <a:solidFill>
-              <a:srgbClr val="AC0000"/>
-            </a:solidFill>
-            <a:prstDash val="dash"/>
-          </a:ln>
-        </p:spPr>
-        <p:style>
-          <a:lnRef idx="2">
-            <a:schemeClr val="accent1">
-              <a:shade val="15000"/>
-            </a:schemeClr>
-          </a:lnRef>
-          <a:fillRef idx="1">
-            <a:schemeClr val="accent1"/>
-          </a:fillRef>
-          <a:effectRef idx="0">
-            <a:schemeClr val="accent1"/>
-          </a:effectRef>
-          <a:fontRef idx="minor">
-            <a:schemeClr val="lt1"/>
-          </a:fontRef>
-        </p:style>
-        <p:txBody>
-          <a:bodyPr rtlCol="0" anchor="ctr"/>
-          <a:lstStyle/>
-          <a:p>
-            <a:pPr algn="ctr"/>
-            <a:endParaRPr lang="en-US"/>
-          </a:p>
-        </p:txBody>
-      </p:sp>
-      <p:sp>
-        <p:nvSpPr>
-          <p:cNvPr id="374" name="TextBox 373">
-            <a:extLst>
-              <a:ext uri="{FF2B5EF4-FFF2-40B4-BE49-F238E27FC236}">
-                <a16:creationId xmlns:a16="http://schemas.microsoft.com/office/drawing/2014/main" id="{215D421C-0835-89D7-CE91-1672DA9BCFAD}"/>
-              </a:ext>
-            </a:extLst>
-          </p:cNvPr>
-          <p:cNvSpPr txBox="1"/>
-          <p:nvPr/>
-        </p:nvSpPr>
-        <p:spPr>
-          <a:xfrm>
-            <a:off x="8594562" y="4631275"/>
-            <a:ext cx="941533" cy="369332"/>
-          </a:xfrm>
-          <a:prstGeom prst="rect">
-            <a:avLst/>
-          </a:prstGeom>
-          <a:noFill/>
-        </p:spPr>
-        <p:txBody>
-          <a:bodyPr wrap="square" rtlCol="0">
-            <a:spAutoFit/>
-          </a:bodyPr>
-          <a:lstStyle/>
-          <a:p>
-            <a:r>
-              <a:rPr lang="en-US" b="1" dirty="0">
-                <a:solidFill>
-                  <a:srgbClr val="AC0000"/>
-                </a:solidFill>
-              </a:rPr>
-              <a:t>DAG 8</a:t>
-            </a:r>
-          </a:p>
-        </p:txBody>
-      </p:sp>
-      <p:grpSp>
-        <p:nvGrpSpPr>
           <p:cNvPr id="52" name="Group 51">
             <a:extLst>
               <a:ext uri="{FF2B5EF4-FFF2-40B4-BE49-F238E27FC236}">
@@ -12190,7 +10710,7 @@
         </p:nvGrpSpPr>
         <p:grpSpPr>
           <a:xfrm>
-            <a:off x="4300865" y="3251100"/>
+            <a:off x="4392305" y="3195860"/>
             <a:ext cx="1935210" cy="2549237"/>
             <a:chOff x="4832229" y="3245769"/>
             <a:chExt cx="1935210" cy="2549237"/>
@@ -13297,470 +11817,1971 @@
           </p:style>
         </p:cxnSp>
       </p:grpSp>
-      <p:sp>
-        <p:nvSpPr>
-          <p:cNvPr id="54" name="Rectangle 53">
+      <p:grpSp>
+        <p:nvGrpSpPr>
+          <p:cNvPr id="30" name="Group 29">
             <a:extLst>
               <a:ext uri="{FF2B5EF4-FFF2-40B4-BE49-F238E27FC236}">
-                <a16:creationId xmlns:a16="http://schemas.microsoft.com/office/drawing/2014/main" id="{24770A54-94BE-77DA-17C2-2359D8A3A33F}"/>
+                <a16:creationId xmlns:a16="http://schemas.microsoft.com/office/drawing/2014/main" id="{3DD728E5-5EA1-1E3C-E79D-C2E924088ED4}"/>
               </a:ext>
             </a:extLst>
           </p:cNvPr>
-          <p:cNvSpPr/>
+          <p:cNvGrpSpPr/>
           <p:nvPr/>
-        </p:nvSpPr>
-        <p:spPr>
+        </p:nvGrpSpPr>
+        <p:grpSpPr>
           <a:xfrm>
-            <a:off x="6426041" y="4478676"/>
-            <a:ext cx="232321" cy="369996"/>
+            <a:off x="6521503" y="3188299"/>
+            <a:ext cx="3170570" cy="2549237"/>
+            <a:chOff x="6365525" y="3251099"/>
+            <a:chExt cx="3170570" cy="2549237"/>
           </a:xfrm>
-          <a:prstGeom prst="rect">
-            <a:avLst/>
-          </a:prstGeom>
-          <a:solidFill>
-            <a:srgbClr val="00B0F0"/>
-          </a:solidFill>
-          <a:ln>
+        </p:grpSpPr>
+        <p:grpSp>
+          <p:nvGrpSpPr>
+            <p:cNvPr id="450" name="Group 449">
+              <a:extLst>
+                <a:ext uri="{FF2B5EF4-FFF2-40B4-BE49-F238E27FC236}">
+                  <a16:creationId xmlns:a16="http://schemas.microsoft.com/office/drawing/2014/main" id="{246C670D-A069-AA83-E67C-2C3C97D66BBE}"/>
+                </a:ext>
+              </a:extLst>
+            </p:cNvPr>
+            <p:cNvGrpSpPr/>
+            <p:nvPr/>
+          </p:nvGrpSpPr>
+          <p:grpSpPr>
+            <a:xfrm>
+              <a:off x="7645457" y="3437412"/>
+              <a:ext cx="219925" cy="1790773"/>
+              <a:chOff x="4092396" y="2384611"/>
+              <a:chExt cx="304800" cy="1528482"/>
+            </a:xfrm>
+            <a:solidFill>
+              <a:srgbClr val="00B0F0"/>
+            </a:solidFill>
+          </p:grpSpPr>
+          <p:sp>
+            <p:nvSpPr>
+              <p:cNvPr id="451" name="Rectangle 450">
+                <a:extLst>
+                  <a:ext uri="{FF2B5EF4-FFF2-40B4-BE49-F238E27FC236}">
+                    <a16:creationId xmlns:a16="http://schemas.microsoft.com/office/drawing/2014/main" id="{B8786BB7-6219-5244-6BF4-335B111D2735}"/>
+                  </a:ext>
+                </a:extLst>
+              </p:cNvPr>
+              <p:cNvSpPr/>
+              <p:nvPr/>
+            </p:nvSpPr>
+            <p:spPr>
+              <a:xfrm>
+                <a:off x="4092396" y="2384611"/>
+                <a:ext cx="304800" cy="304800"/>
+              </a:xfrm>
+              <a:prstGeom prst="rect">
+                <a:avLst/>
+              </a:prstGeom>
+              <a:grpFill/>
+              <a:ln>
+                <a:noFill/>
+              </a:ln>
+            </p:spPr>
+            <p:style>
+              <a:lnRef idx="2">
+                <a:schemeClr val="accent1">
+                  <a:shade val="15000"/>
+                </a:schemeClr>
+              </a:lnRef>
+              <a:fillRef idx="1">
+                <a:schemeClr val="accent1"/>
+              </a:fillRef>
+              <a:effectRef idx="0">
+                <a:schemeClr val="accent1"/>
+              </a:effectRef>
+              <a:fontRef idx="minor">
+                <a:schemeClr val="lt1"/>
+              </a:fontRef>
+            </p:style>
+            <p:txBody>
+              <a:bodyPr rtlCol="0" anchor="ctr"/>
+              <a:lstStyle/>
+              <a:p>
+                <a:pPr algn="ctr"/>
+                <a:endParaRPr lang="en-US" sz="2000" b="1"/>
+              </a:p>
+            </p:txBody>
+          </p:sp>
+          <p:sp>
+            <p:nvSpPr>
+              <p:cNvPr id="452" name="Rectangle 451">
+                <a:extLst>
+                  <a:ext uri="{FF2B5EF4-FFF2-40B4-BE49-F238E27FC236}">
+                    <a16:creationId xmlns:a16="http://schemas.microsoft.com/office/drawing/2014/main" id="{9F9C5C41-4BE9-CA66-B8A5-C847A25501AE}"/>
+                  </a:ext>
+                </a:extLst>
+              </p:cNvPr>
+              <p:cNvSpPr/>
+              <p:nvPr/>
+            </p:nvSpPr>
+            <p:spPr>
+              <a:xfrm>
+                <a:off x="4092396" y="2792505"/>
+                <a:ext cx="304800" cy="304800"/>
+              </a:xfrm>
+              <a:prstGeom prst="rect">
+                <a:avLst/>
+              </a:prstGeom>
+              <a:grpFill/>
+              <a:ln>
+                <a:noFill/>
+              </a:ln>
+            </p:spPr>
+            <p:style>
+              <a:lnRef idx="2">
+                <a:schemeClr val="accent1">
+                  <a:shade val="15000"/>
+                </a:schemeClr>
+              </a:lnRef>
+              <a:fillRef idx="1">
+                <a:schemeClr val="accent1"/>
+              </a:fillRef>
+              <a:effectRef idx="0">
+                <a:schemeClr val="accent1"/>
+              </a:effectRef>
+              <a:fontRef idx="minor">
+                <a:schemeClr val="lt1"/>
+              </a:fontRef>
+            </p:style>
+            <p:txBody>
+              <a:bodyPr rtlCol="0" anchor="ctr"/>
+              <a:lstStyle/>
+              <a:p>
+                <a:pPr algn="ctr"/>
+                <a:endParaRPr lang="en-US" sz="2000" b="1"/>
+              </a:p>
+            </p:txBody>
+          </p:sp>
+          <p:sp>
+            <p:nvSpPr>
+              <p:cNvPr id="453" name="Rectangle 452">
+                <a:extLst>
+                  <a:ext uri="{FF2B5EF4-FFF2-40B4-BE49-F238E27FC236}">
+                    <a16:creationId xmlns:a16="http://schemas.microsoft.com/office/drawing/2014/main" id="{FE8AEF53-E51E-61A5-0815-67D02E9C7EAC}"/>
+                  </a:ext>
+                </a:extLst>
+              </p:cNvPr>
+              <p:cNvSpPr/>
+              <p:nvPr/>
+            </p:nvSpPr>
+            <p:spPr>
+              <a:xfrm>
+                <a:off x="4092396" y="3200399"/>
+                <a:ext cx="304800" cy="304800"/>
+              </a:xfrm>
+              <a:prstGeom prst="rect">
+                <a:avLst/>
+              </a:prstGeom>
+              <a:grpFill/>
+              <a:ln>
+                <a:noFill/>
+              </a:ln>
+            </p:spPr>
+            <p:style>
+              <a:lnRef idx="2">
+                <a:schemeClr val="accent1">
+                  <a:shade val="15000"/>
+                </a:schemeClr>
+              </a:lnRef>
+              <a:fillRef idx="1">
+                <a:schemeClr val="accent1"/>
+              </a:fillRef>
+              <a:effectRef idx="0">
+                <a:schemeClr val="accent1"/>
+              </a:effectRef>
+              <a:fontRef idx="minor">
+                <a:schemeClr val="lt1"/>
+              </a:fontRef>
+            </p:style>
+            <p:txBody>
+              <a:bodyPr rtlCol="0" anchor="ctr"/>
+              <a:lstStyle/>
+              <a:p>
+                <a:pPr algn="ctr"/>
+                <a:endParaRPr lang="en-US" sz="2000" b="1"/>
+              </a:p>
+            </p:txBody>
+          </p:sp>
+          <p:sp>
+            <p:nvSpPr>
+              <p:cNvPr id="454" name="Rectangle 453">
+                <a:extLst>
+                  <a:ext uri="{FF2B5EF4-FFF2-40B4-BE49-F238E27FC236}">
+                    <a16:creationId xmlns:a16="http://schemas.microsoft.com/office/drawing/2014/main" id="{9C8547F7-FEAC-4F2B-003C-F4D525315B7E}"/>
+                  </a:ext>
+                </a:extLst>
+              </p:cNvPr>
+              <p:cNvSpPr/>
+              <p:nvPr/>
+            </p:nvSpPr>
+            <p:spPr>
+              <a:xfrm>
+                <a:off x="4092396" y="3608293"/>
+                <a:ext cx="304800" cy="304800"/>
+              </a:xfrm>
+              <a:prstGeom prst="rect">
+                <a:avLst/>
+              </a:prstGeom>
+              <a:grpFill/>
+              <a:ln>
+                <a:noFill/>
+              </a:ln>
+            </p:spPr>
+            <p:style>
+              <a:lnRef idx="2">
+                <a:schemeClr val="accent1">
+                  <a:shade val="15000"/>
+                </a:schemeClr>
+              </a:lnRef>
+              <a:fillRef idx="1">
+                <a:schemeClr val="accent1"/>
+              </a:fillRef>
+              <a:effectRef idx="0">
+                <a:schemeClr val="accent1"/>
+              </a:effectRef>
+              <a:fontRef idx="minor">
+                <a:schemeClr val="lt1"/>
+              </a:fontRef>
+            </p:style>
+            <p:txBody>
+              <a:bodyPr rtlCol="0" anchor="ctr"/>
+              <a:lstStyle/>
+              <a:p>
+                <a:pPr algn="ctr"/>
+                <a:endParaRPr lang="en-US" sz="2000" b="1"/>
+              </a:p>
+            </p:txBody>
+          </p:sp>
+        </p:grpSp>
+        <p:cxnSp>
+          <p:nvCxnSpPr>
+            <p:cNvPr id="460" name="Straight Arrow Connector 459">
+              <a:extLst>
+                <a:ext uri="{FF2B5EF4-FFF2-40B4-BE49-F238E27FC236}">
+                  <a16:creationId xmlns:a16="http://schemas.microsoft.com/office/drawing/2014/main" id="{970B2A50-C802-B07B-396F-752D14FA552B}"/>
+                </a:ext>
+              </a:extLst>
+            </p:cNvPr>
+            <p:cNvCxnSpPr>
+              <a:cxnSpLocks/>
+              <a:stCxn id="279" idx="6"/>
+              <a:endCxn id="451" idx="1"/>
+            </p:cNvCxnSpPr>
+            <p:nvPr/>
+          </p:nvCxnSpPr>
+          <p:spPr>
+            <a:xfrm>
+              <a:off x="7300842" y="3612577"/>
+              <a:ext cx="344615" cy="3387"/>
+            </a:xfrm>
+            <a:prstGeom prst="straightConnector1">
+              <a:avLst/>
+            </a:prstGeom>
+            <a:ln w="28575">
+              <a:solidFill>
+                <a:schemeClr val="tx1"/>
+              </a:solidFill>
+              <a:tailEnd type="triangle"/>
+            </a:ln>
+          </p:spPr>
+          <p:style>
+            <a:lnRef idx="1">
+              <a:schemeClr val="dk1"/>
+            </a:lnRef>
+            <a:fillRef idx="0">
+              <a:schemeClr val="dk1"/>
+            </a:fillRef>
+            <a:effectRef idx="0">
+              <a:schemeClr val="dk1"/>
+            </a:effectRef>
+            <a:fontRef idx="minor">
+              <a:schemeClr val="tx1"/>
+            </a:fontRef>
+          </p:style>
+        </p:cxnSp>
+        <p:cxnSp>
+          <p:nvCxnSpPr>
+            <p:cNvPr id="463" name="Straight Arrow Connector 462">
+              <a:extLst>
+                <a:ext uri="{FF2B5EF4-FFF2-40B4-BE49-F238E27FC236}">
+                  <a16:creationId xmlns:a16="http://schemas.microsoft.com/office/drawing/2014/main" id="{20FEBFB4-3276-7CC6-49C2-A392C7E96D1B}"/>
+                </a:ext>
+              </a:extLst>
+            </p:cNvPr>
+            <p:cNvCxnSpPr>
+              <a:cxnSpLocks/>
+              <a:stCxn id="280" idx="6"/>
+              <a:endCxn id="452" idx="1"/>
+            </p:cNvCxnSpPr>
+            <p:nvPr/>
+          </p:nvCxnSpPr>
+          <p:spPr>
+            <a:xfrm>
+              <a:off x="7300842" y="4090467"/>
+              <a:ext cx="344615" cy="3387"/>
+            </a:xfrm>
+            <a:prstGeom prst="straightConnector1">
+              <a:avLst/>
+            </a:prstGeom>
+            <a:ln w="28575">
+              <a:solidFill>
+                <a:schemeClr val="tx1"/>
+              </a:solidFill>
+              <a:tailEnd type="triangle"/>
+            </a:ln>
+          </p:spPr>
+          <p:style>
+            <a:lnRef idx="1">
+              <a:schemeClr val="dk1"/>
+            </a:lnRef>
+            <a:fillRef idx="0">
+              <a:schemeClr val="dk1"/>
+            </a:fillRef>
+            <a:effectRef idx="0">
+              <a:schemeClr val="dk1"/>
+            </a:effectRef>
+            <a:fontRef idx="minor">
+              <a:schemeClr val="tx1"/>
+            </a:fontRef>
+          </p:style>
+        </p:cxnSp>
+        <p:cxnSp>
+          <p:nvCxnSpPr>
+            <p:cNvPr id="466" name="Straight Arrow Connector 465">
+              <a:extLst>
+                <a:ext uri="{FF2B5EF4-FFF2-40B4-BE49-F238E27FC236}">
+                  <a16:creationId xmlns:a16="http://schemas.microsoft.com/office/drawing/2014/main" id="{C117E4E3-907E-6A7D-4536-525743D21A7D}"/>
+                </a:ext>
+              </a:extLst>
+            </p:cNvPr>
+            <p:cNvCxnSpPr>
+              <a:cxnSpLocks/>
+              <a:stCxn id="281" idx="6"/>
+              <a:endCxn id="453" idx="1"/>
+            </p:cNvCxnSpPr>
+            <p:nvPr/>
+          </p:nvCxnSpPr>
+          <p:spPr>
+            <a:xfrm>
+              <a:off x="7300842" y="4563333"/>
+              <a:ext cx="344615" cy="8410"/>
+            </a:xfrm>
+            <a:prstGeom prst="straightConnector1">
+              <a:avLst/>
+            </a:prstGeom>
+            <a:ln w="28575">
+              <a:solidFill>
+                <a:schemeClr val="tx1"/>
+              </a:solidFill>
+              <a:tailEnd type="triangle"/>
+            </a:ln>
+          </p:spPr>
+          <p:style>
+            <a:lnRef idx="1">
+              <a:schemeClr val="dk1"/>
+            </a:lnRef>
+            <a:fillRef idx="0">
+              <a:schemeClr val="dk1"/>
+            </a:fillRef>
+            <a:effectRef idx="0">
+              <a:schemeClr val="dk1"/>
+            </a:effectRef>
+            <a:fontRef idx="minor">
+              <a:schemeClr val="tx1"/>
+            </a:fontRef>
+          </p:style>
+        </p:cxnSp>
+        <p:cxnSp>
+          <p:nvCxnSpPr>
+            <p:cNvPr id="469" name="Straight Arrow Connector 468">
+              <a:extLst>
+                <a:ext uri="{FF2B5EF4-FFF2-40B4-BE49-F238E27FC236}">
+                  <a16:creationId xmlns:a16="http://schemas.microsoft.com/office/drawing/2014/main" id="{AE6E01C8-C9CF-FC67-D0B4-01D4EB6AC6D8}"/>
+                </a:ext>
+              </a:extLst>
+            </p:cNvPr>
+            <p:cNvCxnSpPr>
+              <a:cxnSpLocks/>
+              <a:stCxn id="283" idx="6"/>
+              <a:endCxn id="454" idx="1"/>
+            </p:cNvCxnSpPr>
+            <p:nvPr/>
+          </p:nvCxnSpPr>
+          <p:spPr>
+            <a:xfrm>
+              <a:off x="7300842" y="5041222"/>
+              <a:ext cx="344615" cy="8411"/>
+            </a:xfrm>
+            <a:prstGeom prst="straightConnector1">
+              <a:avLst/>
+            </a:prstGeom>
+            <a:ln w="28575">
+              <a:solidFill>
+                <a:schemeClr val="tx1"/>
+              </a:solidFill>
+              <a:tailEnd type="triangle"/>
+            </a:ln>
+          </p:spPr>
+          <p:style>
+            <a:lnRef idx="1">
+              <a:schemeClr val="dk1"/>
+            </a:lnRef>
+            <a:fillRef idx="0">
+              <a:schemeClr val="dk1"/>
+            </a:fillRef>
+            <a:effectRef idx="0">
+              <a:schemeClr val="dk1"/>
+            </a:effectRef>
+            <a:fontRef idx="minor">
+              <a:schemeClr val="tx1"/>
+            </a:fontRef>
+          </p:style>
+        </p:cxnSp>
+        <p:grpSp>
+          <p:nvGrpSpPr>
+            <p:cNvPr id="472" name="Group 471">
+              <a:extLst>
+                <a:ext uri="{FF2B5EF4-FFF2-40B4-BE49-F238E27FC236}">
+                  <a16:creationId xmlns:a16="http://schemas.microsoft.com/office/drawing/2014/main" id="{A59CB9D1-F27B-881F-9493-7700BA54E211}"/>
+                </a:ext>
+              </a:extLst>
+            </p:cNvPr>
+            <p:cNvGrpSpPr/>
+            <p:nvPr/>
+          </p:nvGrpSpPr>
+          <p:grpSpPr>
+            <a:xfrm>
+              <a:off x="8157784" y="3437411"/>
+              <a:ext cx="1342879" cy="2333957"/>
+              <a:chOff x="3263434" y="2384611"/>
+              <a:chExt cx="1219201" cy="1992106"/>
+            </a:xfrm>
+          </p:grpSpPr>
+          <p:sp>
+            <p:nvSpPr>
+              <p:cNvPr id="473" name="Oval 472">
+                <a:extLst>
+                  <a:ext uri="{FF2B5EF4-FFF2-40B4-BE49-F238E27FC236}">
+                    <a16:creationId xmlns:a16="http://schemas.microsoft.com/office/drawing/2014/main" id="{FF8B34A2-B088-BC7C-36C0-BD744CBDF76A}"/>
+                  </a:ext>
+                </a:extLst>
+              </p:cNvPr>
+              <p:cNvSpPr/>
+              <p:nvPr/>
+            </p:nvSpPr>
+            <p:spPr>
+              <a:xfrm>
+                <a:off x="3294535" y="2384611"/>
+                <a:ext cx="304800" cy="304800"/>
+              </a:xfrm>
+              <a:prstGeom prst="ellipse">
+                <a:avLst/>
+              </a:prstGeom>
+              <a:solidFill>
+                <a:schemeClr val="accent6">
+                  <a:lumMod val="50000"/>
+                </a:schemeClr>
+              </a:solidFill>
+              <a:ln>
+                <a:noFill/>
+              </a:ln>
+            </p:spPr>
+            <p:style>
+              <a:lnRef idx="2">
+                <a:schemeClr val="accent1">
+                  <a:shade val="15000"/>
+                </a:schemeClr>
+              </a:lnRef>
+              <a:fillRef idx="1">
+                <a:schemeClr val="accent1"/>
+              </a:fillRef>
+              <a:effectRef idx="0">
+                <a:schemeClr val="accent1"/>
+              </a:effectRef>
+              <a:fontRef idx="minor">
+                <a:schemeClr val="lt1"/>
+              </a:fontRef>
+            </p:style>
+            <p:txBody>
+              <a:bodyPr rtlCol="0" anchor="ctr"/>
+              <a:lstStyle/>
+              <a:p>
+                <a:pPr algn="ctr"/>
+                <a:endParaRPr lang="en-US" sz="2000" b="1"/>
+              </a:p>
+            </p:txBody>
+          </p:sp>
+          <p:sp>
+            <p:nvSpPr>
+              <p:cNvPr id="474" name="Oval 473">
+                <a:extLst>
+                  <a:ext uri="{FF2B5EF4-FFF2-40B4-BE49-F238E27FC236}">
+                    <a16:creationId xmlns:a16="http://schemas.microsoft.com/office/drawing/2014/main" id="{6C636A05-6E22-D277-D61F-31F62D051311}"/>
+                  </a:ext>
+                </a:extLst>
+              </p:cNvPr>
+              <p:cNvSpPr/>
+              <p:nvPr/>
+            </p:nvSpPr>
+            <p:spPr>
+              <a:xfrm>
+                <a:off x="3294535" y="2792505"/>
+                <a:ext cx="304800" cy="304800"/>
+              </a:xfrm>
+              <a:prstGeom prst="ellipse">
+                <a:avLst/>
+              </a:prstGeom>
+              <a:solidFill>
+                <a:schemeClr val="accent6">
+                  <a:lumMod val="50000"/>
+                </a:schemeClr>
+              </a:solidFill>
+              <a:ln>
+                <a:noFill/>
+              </a:ln>
+            </p:spPr>
+            <p:style>
+              <a:lnRef idx="2">
+                <a:schemeClr val="accent1">
+                  <a:shade val="15000"/>
+                </a:schemeClr>
+              </a:lnRef>
+              <a:fillRef idx="1">
+                <a:schemeClr val="accent1"/>
+              </a:fillRef>
+              <a:effectRef idx="0">
+                <a:schemeClr val="accent1"/>
+              </a:effectRef>
+              <a:fontRef idx="minor">
+                <a:schemeClr val="lt1"/>
+              </a:fontRef>
+            </p:style>
+            <p:txBody>
+              <a:bodyPr rtlCol="0" anchor="ctr"/>
+              <a:lstStyle/>
+              <a:p>
+                <a:pPr algn="ctr"/>
+                <a:endParaRPr lang="en-US" sz="2000" b="1"/>
+              </a:p>
+            </p:txBody>
+          </p:sp>
+          <p:sp>
+            <p:nvSpPr>
+              <p:cNvPr id="475" name="Oval 474">
+                <a:extLst>
+                  <a:ext uri="{FF2B5EF4-FFF2-40B4-BE49-F238E27FC236}">
+                    <a16:creationId xmlns:a16="http://schemas.microsoft.com/office/drawing/2014/main" id="{DB2F7137-948C-1A5C-3C5C-F2DEF37DDB2E}"/>
+                  </a:ext>
+                </a:extLst>
+              </p:cNvPr>
+              <p:cNvSpPr/>
+              <p:nvPr/>
+            </p:nvSpPr>
+            <p:spPr>
+              <a:xfrm>
+                <a:off x="3294535" y="3200399"/>
+                <a:ext cx="304800" cy="304800"/>
+              </a:xfrm>
+              <a:prstGeom prst="ellipse">
+                <a:avLst/>
+              </a:prstGeom>
+              <a:solidFill>
+                <a:schemeClr val="accent6">
+                  <a:lumMod val="50000"/>
+                </a:schemeClr>
+              </a:solidFill>
+              <a:ln>
+                <a:noFill/>
+              </a:ln>
+            </p:spPr>
+            <p:style>
+              <a:lnRef idx="2">
+                <a:schemeClr val="accent1">
+                  <a:shade val="15000"/>
+                </a:schemeClr>
+              </a:lnRef>
+              <a:fillRef idx="1">
+                <a:schemeClr val="accent1"/>
+              </a:fillRef>
+              <a:effectRef idx="0">
+                <a:schemeClr val="accent1"/>
+              </a:effectRef>
+              <a:fontRef idx="minor">
+                <a:schemeClr val="lt1"/>
+              </a:fontRef>
+            </p:style>
+            <p:txBody>
+              <a:bodyPr rtlCol="0" anchor="ctr"/>
+              <a:lstStyle/>
+              <a:p>
+                <a:pPr algn="ctr"/>
+                <a:endParaRPr lang="en-US" sz="2000" b="1"/>
+              </a:p>
+            </p:txBody>
+          </p:sp>
+          <p:grpSp>
+            <p:nvGrpSpPr>
+              <p:cNvPr id="476" name="Group 475">
+                <a:extLst>
+                  <a:ext uri="{FF2B5EF4-FFF2-40B4-BE49-F238E27FC236}">
+                    <a16:creationId xmlns:a16="http://schemas.microsoft.com/office/drawing/2014/main" id="{9DF296A0-9730-1E32-86BE-4381F37C0CCC}"/>
+                  </a:ext>
+                </a:extLst>
+              </p:cNvPr>
+              <p:cNvGrpSpPr/>
+              <p:nvPr/>
+            </p:nvGrpSpPr>
+            <p:grpSpPr>
+              <a:xfrm>
+                <a:off x="3263434" y="3608293"/>
+                <a:ext cx="1219201" cy="768424"/>
+                <a:chOff x="3263434" y="3608293"/>
+                <a:chExt cx="1219201" cy="768424"/>
+              </a:xfrm>
+            </p:grpSpPr>
+            <p:sp>
+              <p:nvSpPr>
+                <p:cNvPr id="477" name="Oval 476">
+                  <a:extLst>
+                    <a:ext uri="{FF2B5EF4-FFF2-40B4-BE49-F238E27FC236}">
+                      <a16:creationId xmlns:a16="http://schemas.microsoft.com/office/drawing/2014/main" id="{33AA2081-13A3-B32B-FCF8-DB09298F984C}"/>
+                    </a:ext>
+                  </a:extLst>
+                </p:cNvPr>
+                <p:cNvSpPr/>
+                <p:nvPr/>
+              </p:nvSpPr>
+              <p:spPr>
+                <a:xfrm>
+                  <a:off x="3294535" y="3608293"/>
+                  <a:ext cx="304800" cy="304800"/>
+                </a:xfrm>
+                <a:prstGeom prst="ellipse">
+                  <a:avLst/>
+                </a:prstGeom>
+                <a:solidFill>
+                  <a:schemeClr val="accent6">
+                    <a:lumMod val="50000"/>
+                  </a:schemeClr>
+                </a:solidFill>
+                <a:ln>
+                  <a:noFill/>
+                </a:ln>
+              </p:spPr>
+              <p:style>
+                <a:lnRef idx="2">
+                  <a:schemeClr val="accent1">
+                    <a:shade val="15000"/>
+                  </a:schemeClr>
+                </a:lnRef>
+                <a:fillRef idx="1">
+                  <a:schemeClr val="accent1"/>
+                </a:fillRef>
+                <a:effectRef idx="0">
+                  <a:schemeClr val="accent1"/>
+                </a:effectRef>
+                <a:fontRef idx="minor">
+                  <a:schemeClr val="lt1"/>
+                </a:fontRef>
+              </p:style>
+              <p:txBody>
+                <a:bodyPr rtlCol="0" anchor="ctr"/>
+                <a:lstStyle/>
+                <a:p>
+                  <a:pPr algn="ctr"/>
+                  <a:endParaRPr lang="en-US" sz="2000" b="1"/>
+                </a:p>
+              </p:txBody>
+            </p:sp>
+            <p:sp>
+              <p:nvSpPr>
+                <p:cNvPr id="478" name="TextBox 477">
+                  <a:extLst>
+                    <a:ext uri="{FF2B5EF4-FFF2-40B4-BE49-F238E27FC236}">
+                      <a16:creationId xmlns:a16="http://schemas.microsoft.com/office/drawing/2014/main" id="{64B0D9A0-D8CB-E168-9FFD-5A7FD12CE72B}"/>
+                    </a:ext>
+                  </a:extLst>
+                </p:cNvPr>
+                <p:cNvSpPr txBox="1"/>
+                <p:nvPr/>
+              </p:nvSpPr>
+              <p:spPr>
+                <a:xfrm>
+                  <a:off x="3263434" y="4035211"/>
+                  <a:ext cx="1219201" cy="341506"/>
+                </a:xfrm>
+                <a:prstGeom prst="rect">
+                  <a:avLst/>
+                </a:prstGeom>
+                <a:noFill/>
+              </p:spPr>
+              <p:txBody>
+                <a:bodyPr wrap="square" rtlCol="0">
+                  <a:spAutoFit/>
+                </a:bodyPr>
+                <a:lstStyle/>
+                <a:p>
+                  <a:pPr algn="ctr"/>
+                  <a:r>
+                    <a:rPr lang="en-US" sz="2000" b="1" dirty="0">
+                      <a:solidFill>
+                        <a:schemeClr val="accent6">
+                          <a:lumMod val="50000"/>
+                        </a:schemeClr>
+                      </a:solidFill>
+                    </a:rPr>
+                    <a:t>speed</a:t>
+                  </a:r>
+                </a:p>
+              </p:txBody>
+            </p:sp>
+            <p:cxnSp>
+              <p:nvCxnSpPr>
+                <p:cNvPr id="479" name="Straight Connector 478">
+                  <a:extLst>
+                    <a:ext uri="{FF2B5EF4-FFF2-40B4-BE49-F238E27FC236}">
+                      <a16:creationId xmlns:a16="http://schemas.microsoft.com/office/drawing/2014/main" id="{CACD5795-C52E-3562-C651-947724CED72F}"/>
+                    </a:ext>
+                  </a:extLst>
+                </p:cNvPr>
+                <p:cNvCxnSpPr>
+                  <a:cxnSpLocks/>
+                  <a:stCxn id="478" idx="0"/>
+                  <a:endCxn id="477" idx="4"/>
+                </p:cNvCxnSpPr>
+                <p:nvPr/>
+              </p:nvCxnSpPr>
+              <p:spPr>
+                <a:xfrm flipH="1" flipV="1">
+                  <a:off x="3446935" y="3913093"/>
+                  <a:ext cx="426100" cy="122117"/>
+                </a:xfrm>
+                <a:prstGeom prst="line">
+                  <a:avLst/>
+                </a:prstGeom>
+                <a:ln w="12700"/>
+              </p:spPr>
+              <p:style>
+                <a:lnRef idx="1">
+                  <a:schemeClr val="dk1"/>
+                </a:lnRef>
+                <a:fillRef idx="0">
+                  <a:schemeClr val="dk1"/>
+                </a:fillRef>
+                <a:effectRef idx="0">
+                  <a:schemeClr val="dk1"/>
+                </a:effectRef>
+                <a:fontRef idx="minor">
+                  <a:schemeClr val="tx1"/>
+                </a:fontRef>
+              </p:style>
+            </p:cxnSp>
+          </p:grpSp>
+        </p:grpSp>
+        <p:cxnSp>
+          <p:nvCxnSpPr>
+            <p:cNvPr id="483" name="Straight Arrow Connector 482">
+              <a:extLst>
+                <a:ext uri="{FF2B5EF4-FFF2-40B4-BE49-F238E27FC236}">
+                  <a16:creationId xmlns:a16="http://schemas.microsoft.com/office/drawing/2014/main" id="{6FB005C3-32BA-5894-9F30-ACCCAF5006B9}"/>
+                </a:ext>
+              </a:extLst>
+            </p:cNvPr>
+            <p:cNvCxnSpPr>
+              <a:cxnSpLocks/>
+              <a:stCxn id="451" idx="3"/>
+              <a:endCxn id="473" idx="2"/>
+            </p:cNvCxnSpPr>
+            <p:nvPr/>
+          </p:nvCxnSpPr>
+          <p:spPr>
+            <a:xfrm>
+              <a:off x="7865382" y="3615964"/>
+              <a:ext cx="326658" cy="0"/>
+            </a:xfrm>
+            <a:prstGeom prst="straightConnector1">
+              <a:avLst/>
+            </a:prstGeom>
+            <a:ln w="28575">
+              <a:solidFill>
+                <a:schemeClr val="tx1"/>
+              </a:solidFill>
+              <a:tailEnd type="triangle"/>
+            </a:ln>
+          </p:spPr>
+          <p:style>
+            <a:lnRef idx="1">
+              <a:schemeClr val="dk1"/>
+            </a:lnRef>
+            <a:fillRef idx="0">
+              <a:schemeClr val="dk1"/>
+            </a:fillRef>
+            <a:effectRef idx="0">
+              <a:schemeClr val="dk1"/>
+            </a:effectRef>
+            <a:fontRef idx="minor">
+              <a:schemeClr val="tx1"/>
+            </a:fontRef>
+          </p:style>
+        </p:cxnSp>
+        <p:cxnSp>
+          <p:nvCxnSpPr>
+            <p:cNvPr id="486" name="Straight Arrow Connector 485">
+              <a:extLst>
+                <a:ext uri="{FF2B5EF4-FFF2-40B4-BE49-F238E27FC236}">
+                  <a16:creationId xmlns:a16="http://schemas.microsoft.com/office/drawing/2014/main" id="{24365360-BD0C-E7E9-A2E4-AD61DE3F7DBF}"/>
+                </a:ext>
+              </a:extLst>
+            </p:cNvPr>
+            <p:cNvCxnSpPr>
+              <a:cxnSpLocks/>
+              <a:stCxn id="452" idx="3"/>
+              <a:endCxn id="474" idx="2"/>
+            </p:cNvCxnSpPr>
+            <p:nvPr/>
+          </p:nvCxnSpPr>
+          <p:spPr>
+            <a:xfrm>
+              <a:off x="7865382" y="4093854"/>
+              <a:ext cx="326658" cy="0"/>
+            </a:xfrm>
+            <a:prstGeom prst="straightConnector1">
+              <a:avLst/>
+            </a:prstGeom>
+            <a:ln w="28575">
+              <a:solidFill>
+                <a:schemeClr val="tx1"/>
+              </a:solidFill>
+              <a:tailEnd type="triangle"/>
+            </a:ln>
+          </p:spPr>
+          <p:style>
+            <a:lnRef idx="1">
+              <a:schemeClr val="dk1"/>
+            </a:lnRef>
+            <a:fillRef idx="0">
+              <a:schemeClr val="dk1"/>
+            </a:fillRef>
+            <a:effectRef idx="0">
+              <a:schemeClr val="dk1"/>
+            </a:effectRef>
+            <a:fontRef idx="minor">
+              <a:schemeClr val="tx1"/>
+            </a:fontRef>
+          </p:style>
+        </p:cxnSp>
+        <p:cxnSp>
+          <p:nvCxnSpPr>
+            <p:cNvPr id="489" name="Straight Arrow Connector 488">
+              <a:extLst>
+                <a:ext uri="{FF2B5EF4-FFF2-40B4-BE49-F238E27FC236}">
+                  <a16:creationId xmlns:a16="http://schemas.microsoft.com/office/drawing/2014/main" id="{8D762FAB-9E62-043F-5360-4086CE408A3E}"/>
+                </a:ext>
+              </a:extLst>
+            </p:cNvPr>
+            <p:cNvCxnSpPr>
+              <a:cxnSpLocks/>
+              <a:stCxn id="453" idx="3"/>
+              <a:endCxn id="475" idx="2"/>
+            </p:cNvCxnSpPr>
+            <p:nvPr/>
+          </p:nvCxnSpPr>
+          <p:spPr>
+            <a:xfrm>
+              <a:off x="7865382" y="4571743"/>
+              <a:ext cx="326658" cy="1"/>
+            </a:xfrm>
+            <a:prstGeom prst="straightConnector1">
+              <a:avLst/>
+            </a:prstGeom>
+            <a:ln w="28575">
+              <a:solidFill>
+                <a:schemeClr val="tx1"/>
+              </a:solidFill>
+              <a:tailEnd type="triangle"/>
+            </a:ln>
+          </p:spPr>
+          <p:style>
+            <a:lnRef idx="1">
+              <a:schemeClr val="dk1"/>
+            </a:lnRef>
+            <a:fillRef idx="0">
+              <a:schemeClr val="dk1"/>
+            </a:fillRef>
+            <a:effectRef idx="0">
+              <a:schemeClr val="dk1"/>
+            </a:effectRef>
+            <a:fontRef idx="minor">
+              <a:schemeClr val="tx1"/>
+            </a:fontRef>
+          </p:style>
+        </p:cxnSp>
+        <p:cxnSp>
+          <p:nvCxnSpPr>
+            <p:cNvPr id="492" name="Straight Arrow Connector 491">
+              <a:extLst>
+                <a:ext uri="{FF2B5EF4-FFF2-40B4-BE49-F238E27FC236}">
+                  <a16:creationId xmlns:a16="http://schemas.microsoft.com/office/drawing/2014/main" id="{2287667C-EAFD-2842-4F38-E96B68FA712B}"/>
+                </a:ext>
+              </a:extLst>
+            </p:cNvPr>
+            <p:cNvCxnSpPr>
+              <a:cxnSpLocks/>
+              <a:stCxn id="454" idx="3"/>
+              <a:endCxn id="477" idx="2"/>
+            </p:cNvCxnSpPr>
+            <p:nvPr/>
+          </p:nvCxnSpPr>
+          <p:spPr>
+            <a:xfrm>
+              <a:off x="7865382" y="5049633"/>
+              <a:ext cx="326658" cy="0"/>
+            </a:xfrm>
+            <a:prstGeom prst="straightConnector1">
+              <a:avLst/>
+            </a:prstGeom>
+            <a:ln w="28575">
+              <a:solidFill>
+                <a:schemeClr val="tx1"/>
+              </a:solidFill>
+              <a:tailEnd type="triangle"/>
+            </a:ln>
+          </p:spPr>
+          <p:style>
+            <a:lnRef idx="1">
+              <a:schemeClr val="dk1"/>
+            </a:lnRef>
+            <a:fillRef idx="0">
+              <a:schemeClr val="dk1"/>
+            </a:fillRef>
+            <a:effectRef idx="0">
+              <a:schemeClr val="dk1"/>
+            </a:effectRef>
+            <a:fontRef idx="minor">
+              <a:schemeClr val="tx1"/>
+            </a:fontRef>
+          </p:style>
+        </p:cxnSp>
+        <p:sp>
+          <p:nvSpPr>
+            <p:cNvPr id="499" name="Rectangle 498">
+              <a:extLst>
+                <a:ext uri="{FF2B5EF4-FFF2-40B4-BE49-F238E27FC236}">
+                  <a16:creationId xmlns:a16="http://schemas.microsoft.com/office/drawing/2014/main" id="{EA7E6A4F-CB1D-85EE-8E67-29ACF94CFBA2}"/>
+                </a:ext>
+              </a:extLst>
+            </p:cNvPr>
+            <p:cNvSpPr/>
+            <p:nvPr/>
+          </p:nvSpPr>
+          <p:spPr>
+            <a:xfrm>
+              <a:off x="8999861" y="3979299"/>
+              <a:ext cx="211501" cy="357105"/>
+            </a:xfrm>
+            <a:prstGeom prst="rect">
+              <a:avLst/>
+            </a:prstGeom>
+            <a:solidFill>
+              <a:srgbClr val="00B0F0"/>
+            </a:solidFill>
+            <a:ln>
+              <a:noFill/>
+            </a:ln>
+          </p:spPr>
+          <p:style>
+            <a:lnRef idx="2">
+              <a:schemeClr val="accent1">
+                <a:shade val="15000"/>
+              </a:schemeClr>
+            </a:lnRef>
+            <a:fillRef idx="1">
+              <a:schemeClr val="accent1"/>
+            </a:fillRef>
+            <a:effectRef idx="0">
+              <a:schemeClr val="accent1"/>
+            </a:effectRef>
+            <a:fontRef idx="minor">
+              <a:schemeClr val="lt1"/>
+            </a:fontRef>
+          </p:style>
+          <p:txBody>
+            <a:bodyPr rtlCol="0" anchor="ctr"/>
+            <a:lstStyle/>
+            <a:p>
+              <a:pPr algn="ctr"/>
+              <a:endParaRPr lang="en-US" sz="2000" b="1"/>
+            </a:p>
+          </p:txBody>
+        </p:sp>
+        <p:cxnSp>
+          <p:nvCxnSpPr>
+            <p:cNvPr id="503" name="Straight Arrow Connector 502">
+              <a:extLst>
+                <a:ext uri="{FF2B5EF4-FFF2-40B4-BE49-F238E27FC236}">
+                  <a16:creationId xmlns:a16="http://schemas.microsoft.com/office/drawing/2014/main" id="{C872770E-3A9E-2EE5-8A7E-FAB0D0B14971}"/>
+                </a:ext>
+              </a:extLst>
+            </p:cNvPr>
+            <p:cNvCxnSpPr>
+              <a:cxnSpLocks/>
+              <a:stCxn id="474" idx="6"/>
+              <a:endCxn id="499" idx="1"/>
+            </p:cNvCxnSpPr>
+            <p:nvPr/>
+          </p:nvCxnSpPr>
+          <p:spPr>
+            <a:xfrm>
+              <a:off x="8527759" y="4093854"/>
+              <a:ext cx="472102" cy="63998"/>
+            </a:xfrm>
+            <a:prstGeom prst="straightConnector1">
+              <a:avLst/>
+            </a:prstGeom>
+            <a:ln w="28575">
+              <a:solidFill>
+                <a:schemeClr val="tx1"/>
+              </a:solidFill>
+              <a:tailEnd type="triangle"/>
+            </a:ln>
+          </p:spPr>
+          <p:style>
+            <a:lnRef idx="1">
+              <a:schemeClr val="dk1"/>
+            </a:lnRef>
+            <a:fillRef idx="0">
+              <a:schemeClr val="dk1"/>
+            </a:fillRef>
+            <a:effectRef idx="0">
+              <a:schemeClr val="dk1"/>
+            </a:effectRef>
+            <a:fontRef idx="minor">
+              <a:schemeClr val="tx1"/>
+            </a:fontRef>
+          </p:style>
+        </p:cxnSp>
+        <p:grpSp>
+          <p:nvGrpSpPr>
+            <p:cNvPr id="278" name="Group 277">
+              <a:extLst>
+                <a:ext uri="{FF2B5EF4-FFF2-40B4-BE49-F238E27FC236}">
+                  <a16:creationId xmlns:a16="http://schemas.microsoft.com/office/drawing/2014/main" id="{DF8D0B66-5634-C388-B191-7B960534FF44}"/>
+                </a:ext>
+              </a:extLst>
+            </p:cNvPr>
+            <p:cNvGrpSpPr/>
+            <p:nvPr/>
+          </p:nvGrpSpPr>
+          <p:grpSpPr>
+            <a:xfrm>
+              <a:off x="6743176" y="3434024"/>
+              <a:ext cx="1824865" cy="2294195"/>
+              <a:chOff x="1507528" y="2388899"/>
+              <a:chExt cx="1623354" cy="1958168"/>
+            </a:xfrm>
+          </p:grpSpPr>
+          <p:sp>
+            <p:nvSpPr>
+              <p:cNvPr id="279" name="Oval 278">
+                <a:extLst>
+                  <a:ext uri="{FF2B5EF4-FFF2-40B4-BE49-F238E27FC236}">
+                    <a16:creationId xmlns:a16="http://schemas.microsoft.com/office/drawing/2014/main" id="{3E3B8C2C-7E8B-37DE-E21D-45FD24425804}"/>
+                  </a:ext>
+                </a:extLst>
+              </p:cNvPr>
+              <p:cNvSpPr/>
+              <p:nvPr/>
+            </p:nvSpPr>
+            <p:spPr>
+              <a:xfrm>
+                <a:off x="1698813" y="2388899"/>
+                <a:ext cx="304800" cy="304800"/>
+              </a:xfrm>
+              <a:prstGeom prst="ellipse">
+                <a:avLst/>
+              </a:prstGeom>
+              <a:solidFill>
+                <a:schemeClr val="accent1">
+                  <a:lumMod val="60000"/>
+                  <a:lumOff val="40000"/>
+                </a:schemeClr>
+              </a:solidFill>
+              <a:ln>
+                <a:noFill/>
+              </a:ln>
+            </p:spPr>
+            <p:style>
+              <a:lnRef idx="2">
+                <a:schemeClr val="accent1">
+                  <a:shade val="15000"/>
+                </a:schemeClr>
+              </a:lnRef>
+              <a:fillRef idx="1">
+                <a:schemeClr val="accent1"/>
+              </a:fillRef>
+              <a:effectRef idx="0">
+                <a:schemeClr val="accent1"/>
+              </a:effectRef>
+              <a:fontRef idx="minor">
+                <a:schemeClr val="lt1"/>
+              </a:fontRef>
+            </p:style>
+            <p:txBody>
+              <a:bodyPr rtlCol="0" anchor="ctr"/>
+              <a:lstStyle/>
+              <a:p>
+                <a:pPr algn="ctr"/>
+                <a:endParaRPr lang="en-US" sz="2000" b="1"/>
+              </a:p>
+            </p:txBody>
+          </p:sp>
+          <p:sp>
+            <p:nvSpPr>
+              <p:cNvPr id="280" name="Oval 279">
+                <a:extLst>
+                  <a:ext uri="{FF2B5EF4-FFF2-40B4-BE49-F238E27FC236}">
+                    <a16:creationId xmlns:a16="http://schemas.microsoft.com/office/drawing/2014/main" id="{EAFE00DA-1EE7-88F1-B16D-725ECEF022EB}"/>
+                  </a:ext>
+                </a:extLst>
+              </p:cNvPr>
+              <p:cNvSpPr/>
+              <p:nvPr/>
+            </p:nvSpPr>
+            <p:spPr>
+              <a:xfrm>
+                <a:off x="1698813" y="2796793"/>
+                <a:ext cx="304800" cy="304800"/>
+              </a:xfrm>
+              <a:prstGeom prst="ellipse">
+                <a:avLst/>
+              </a:prstGeom>
+              <a:solidFill>
+                <a:schemeClr val="accent1">
+                  <a:lumMod val="60000"/>
+                  <a:lumOff val="40000"/>
+                </a:schemeClr>
+              </a:solidFill>
+              <a:ln>
+                <a:noFill/>
+              </a:ln>
+            </p:spPr>
+            <p:style>
+              <a:lnRef idx="2">
+                <a:schemeClr val="accent1">
+                  <a:shade val="15000"/>
+                </a:schemeClr>
+              </a:lnRef>
+              <a:fillRef idx="1">
+                <a:schemeClr val="accent1"/>
+              </a:fillRef>
+              <a:effectRef idx="0">
+                <a:schemeClr val="accent1"/>
+              </a:effectRef>
+              <a:fontRef idx="minor">
+                <a:schemeClr val="lt1"/>
+              </a:fontRef>
+            </p:style>
+            <p:txBody>
+              <a:bodyPr rtlCol="0" anchor="ctr"/>
+              <a:lstStyle/>
+              <a:p>
+                <a:pPr algn="ctr"/>
+                <a:endParaRPr lang="en-US" sz="2000" b="1"/>
+              </a:p>
+            </p:txBody>
+          </p:sp>
+          <p:sp>
+            <p:nvSpPr>
+              <p:cNvPr id="281" name="Oval 280">
+                <a:extLst>
+                  <a:ext uri="{FF2B5EF4-FFF2-40B4-BE49-F238E27FC236}">
+                    <a16:creationId xmlns:a16="http://schemas.microsoft.com/office/drawing/2014/main" id="{B31B8E92-A8E1-CB6F-20A7-379FFDDB3CC3}"/>
+                  </a:ext>
+                </a:extLst>
+              </p:cNvPr>
+              <p:cNvSpPr/>
+              <p:nvPr/>
+            </p:nvSpPr>
+            <p:spPr>
+              <a:xfrm>
+                <a:off x="1698813" y="3200399"/>
+                <a:ext cx="304800" cy="304800"/>
+              </a:xfrm>
+              <a:prstGeom prst="ellipse">
+                <a:avLst/>
+              </a:prstGeom>
+              <a:solidFill>
+                <a:schemeClr val="accent1">
+                  <a:lumMod val="60000"/>
+                  <a:lumOff val="40000"/>
+                </a:schemeClr>
+              </a:solidFill>
+              <a:ln>
+                <a:noFill/>
+              </a:ln>
+            </p:spPr>
+            <p:style>
+              <a:lnRef idx="2">
+                <a:schemeClr val="accent1">
+                  <a:shade val="15000"/>
+                </a:schemeClr>
+              </a:lnRef>
+              <a:fillRef idx="1">
+                <a:schemeClr val="accent1"/>
+              </a:fillRef>
+              <a:effectRef idx="0">
+                <a:schemeClr val="accent1"/>
+              </a:effectRef>
+              <a:fontRef idx="minor">
+                <a:schemeClr val="lt1"/>
+              </a:fontRef>
+            </p:style>
+            <p:txBody>
+              <a:bodyPr rtlCol="0" anchor="ctr"/>
+              <a:lstStyle/>
+              <a:p>
+                <a:pPr algn="ctr"/>
+                <a:endParaRPr lang="en-US" sz="2000" b="1"/>
+              </a:p>
+            </p:txBody>
+          </p:sp>
+          <p:grpSp>
+            <p:nvGrpSpPr>
+              <p:cNvPr id="282" name="Group 281">
+                <a:extLst>
+                  <a:ext uri="{FF2B5EF4-FFF2-40B4-BE49-F238E27FC236}">
+                    <a16:creationId xmlns:a16="http://schemas.microsoft.com/office/drawing/2014/main" id="{D7E66387-089D-8048-D51C-4A89750A7E25}"/>
+                  </a:ext>
+                </a:extLst>
+              </p:cNvPr>
+              <p:cNvGrpSpPr/>
+              <p:nvPr/>
+            </p:nvGrpSpPr>
+            <p:grpSpPr>
+              <a:xfrm>
+                <a:off x="1507528" y="3608293"/>
+                <a:ext cx="1623354" cy="738774"/>
+                <a:chOff x="1507528" y="3608293"/>
+                <a:chExt cx="1623354" cy="738774"/>
+              </a:xfrm>
+            </p:grpSpPr>
+            <p:sp>
+              <p:nvSpPr>
+                <p:cNvPr id="283" name="Oval 282">
+                  <a:extLst>
+                    <a:ext uri="{FF2B5EF4-FFF2-40B4-BE49-F238E27FC236}">
+                      <a16:creationId xmlns:a16="http://schemas.microsoft.com/office/drawing/2014/main" id="{87DB7F8C-9EF1-BDB2-C6D3-7BA6339DF0F4}"/>
+                    </a:ext>
+                  </a:extLst>
+                </p:cNvPr>
+                <p:cNvSpPr/>
+                <p:nvPr/>
+              </p:nvSpPr>
+              <p:spPr>
+                <a:xfrm>
+                  <a:off x="1698813" y="3608293"/>
+                  <a:ext cx="304800" cy="304800"/>
+                </a:xfrm>
+                <a:prstGeom prst="ellipse">
+                  <a:avLst/>
+                </a:prstGeom>
+                <a:solidFill>
+                  <a:schemeClr val="accent1">
+                    <a:lumMod val="60000"/>
+                    <a:lumOff val="40000"/>
+                  </a:schemeClr>
+                </a:solidFill>
+                <a:ln>
+                  <a:noFill/>
+                </a:ln>
+              </p:spPr>
+              <p:style>
+                <a:lnRef idx="2">
+                  <a:schemeClr val="accent1">
+                    <a:shade val="15000"/>
+                  </a:schemeClr>
+                </a:lnRef>
+                <a:fillRef idx="1">
+                  <a:schemeClr val="accent1"/>
+                </a:fillRef>
+                <a:effectRef idx="0">
+                  <a:schemeClr val="accent1"/>
+                </a:effectRef>
+                <a:fontRef idx="minor">
+                  <a:schemeClr val="lt1"/>
+                </a:fontRef>
+              </p:style>
+              <p:txBody>
+                <a:bodyPr rtlCol="0" anchor="ctr"/>
+                <a:lstStyle/>
+                <a:p>
+                  <a:pPr algn="ctr"/>
+                  <a:endParaRPr lang="en-US" sz="2000" b="1"/>
+                </a:p>
+              </p:txBody>
+            </p:sp>
+            <p:sp>
+              <p:nvSpPr>
+                <p:cNvPr id="284" name="TextBox 283">
+                  <a:extLst>
+                    <a:ext uri="{FF2B5EF4-FFF2-40B4-BE49-F238E27FC236}">
+                      <a16:creationId xmlns:a16="http://schemas.microsoft.com/office/drawing/2014/main" id="{66AD9E63-02A6-F700-6AE2-2DCF28FFADCB}"/>
+                    </a:ext>
+                  </a:extLst>
+                </p:cNvPr>
+                <p:cNvSpPr txBox="1"/>
+                <p:nvPr/>
+              </p:nvSpPr>
+              <p:spPr>
+                <a:xfrm>
+                  <a:off x="1507528" y="4058100"/>
+                  <a:ext cx="1623354" cy="288967"/>
+                </a:xfrm>
+                <a:prstGeom prst="rect">
+                  <a:avLst/>
+                </a:prstGeom>
+                <a:noFill/>
+              </p:spPr>
+              <p:txBody>
+                <a:bodyPr wrap="square" rtlCol="0">
+                  <a:spAutoFit/>
+                </a:bodyPr>
+                <a:lstStyle/>
+                <a:p>
+                  <a:pPr algn="ctr"/>
+                  <a:r>
+                    <a:rPr lang="en-US" sz="1600" b="1" dirty="0" err="1">
+                      <a:solidFill>
+                        <a:schemeClr val="accent1">
+                          <a:lumMod val="60000"/>
+                          <a:lumOff val="40000"/>
+                        </a:schemeClr>
+                      </a:solidFill>
+                    </a:rPr>
+                    <a:t>mapfea</a:t>
+                  </a:r>
+                  <a:r>
+                    <a:rPr lang="en-US" sz="1600" b="1" dirty="0">
+                      <a:solidFill>
+                        <a:schemeClr val="accent1">
+                          <a:lumMod val="60000"/>
+                          <a:lumOff val="40000"/>
+                        </a:schemeClr>
+                      </a:solidFill>
+                    </a:rPr>
+                    <a:t> (96 tasks)</a:t>
+                  </a:r>
+                </a:p>
+              </p:txBody>
+            </p:sp>
+            <p:cxnSp>
+              <p:nvCxnSpPr>
+                <p:cNvPr id="285" name="Straight Connector 284">
+                  <a:extLst>
+                    <a:ext uri="{FF2B5EF4-FFF2-40B4-BE49-F238E27FC236}">
+                      <a16:creationId xmlns:a16="http://schemas.microsoft.com/office/drawing/2014/main" id="{A784969C-6D20-9C92-19CA-ADB4C91EFA0E}"/>
+                    </a:ext>
+                  </a:extLst>
+                </p:cNvPr>
+                <p:cNvCxnSpPr>
+                  <a:cxnSpLocks/>
+                  <a:stCxn id="284" idx="0"/>
+                  <a:endCxn id="283" idx="4"/>
+                </p:cNvCxnSpPr>
+                <p:nvPr/>
+              </p:nvCxnSpPr>
+              <p:spPr>
+                <a:xfrm flipH="1" flipV="1">
+                  <a:off x="1851213" y="3913093"/>
+                  <a:ext cx="467992" cy="145006"/>
+                </a:xfrm>
+                <a:prstGeom prst="line">
+                  <a:avLst/>
+                </a:prstGeom>
+                <a:ln w="12700"/>
+              </p:spPr>
+              <p:style>
+                <a:lnRef idx="1">
+                  <a:schemeClr val="dk1"/>
+                </a:lnRef>
+                <a:fillRef idx="0">
+                  <a:schemeClr val="dk1"/>
+                </a:fillRef>
+                <a:effectRef idx="0">
+                  <a:schemeClr val="dk1"/>
+                </a:effectRef>
+                <a:fontRef idx="minor">
+                  <a:schemeClr val="tx1"/>
+                </a:fontRef>
+              </p:style>
+            </p:cxnSp>
+          </p:grpSp>
+        </p:grpSp>
+        <p:sp>
+          <p:nvSpPr>
+            <p:cNvPr id="373" name="Rectangle: Rounded Corners 372">
+              <a:extLst>
+                <a:ext uri="{FF2B5EF4-FFF2-40B4-BE49-F238E27FC236}">
+                  <a16:creationId xmlns:a16="http://schemas.microsoft.com/office/drawing/2014/main" id="{5FE7F037-875D-850F-3DF4-6E4EDB17F130}"/>
+                </a:ext>
+              </a:extLst>
+            </p:cNvPr>
+            <p:cNvSpPr/>
+            <p:nvPr/>
+          </p:nvSpPr>
+          <p:spPr>
+            <a:xfrm>
+              <a:off x="6365525" y="3251099"/>
+              <a:ext cx="2989385" cy="2549237"/>
+            </a:xfrm>
+            <a:prstGeom prst="roundRect">
+              <a:avLst/>
+            </a:prstGeom>
             <a:noFill/>
-          </a:ln>
-        </p:spPr>
-        <p:style>
-          <a:lnRef idx="2">
-            <a:schemeClr val="accent1">
-              <a:shade val="15000"/>
-            </a:schemeClr>
-          </a:lnRef>
-          <a:fillRef idx="1">
-            <a:schemeClr val="accent1"/>
-          </a:fillRef>
-          <a:effectRef idx="0">
-            <a:schemeClr val="accent1"/>
-          </a:effectRef>
-          <a:fontRef idx="minor">
-            <a:schemeClr val="lt1"/>
-          </a:fontRef>
-        </p:style>
-        <p:txBody>
-          <a:bodyPr rtlCol="0" anchor="ctr"/>
-          <a:lstStyle/>
-          <a:p>
-            <a:pPr algn="ctr"/>
-            <a:endParaRPr lang="en-US" sz="2000" b="1" dirty="0"/>
-          </a:p>
-        </p:txBody>
-      </p:sp>
-      <p:cxnSp>
-        <p:nvCxnSpPr>
-          <p:cNvPr id="55" name="Straight Arrow Connector 54">
-            <a:extLst>
-              <a:ext uri="{FF2B5EF4-FFF2-40B4-BE49-F238E27FC236}">
-                <a16:creationId xmlns:a16="http://schemas.microsoft.com/office/drawing/2014/main" id="{33F0C675-6E0F-EA68-C3EF-CE33E11F4700}"/>
-              </a:ext>
-            </a:extLst>
-          </p:cNvPr>
-          <p:cNvCxnSpPr>
-            <a:cxnSpLocks/>
-            <a:stCxn id="54" idx="3"/>
-          </p:cNvCxnSpPr>
-          <p:nvPr/>
-        </p:nvCxnSpPr>
-        <p:spPr>
-          <a:xfrm flipV="1">
-            <a:off x="6658362" y="3612577"/>
-            <a:ext cx="326742" cy="1051097"/>
-          </a:xfrm>
-          <a:prstGeom prst="straightConnector1">
-            <a:avLst/>
-          </a:prstGeom>
-          <a:ln w="28575">
+            <a:ln w="28575">
+              <a:solidFill>
+                <a:srgbClr val="AC0000"/>
+              </a:solidFill>
+              <a:prstDash val="dash"/>
+            </a:ln>
+          </p:spPr>
+          <p:style>
+            <a:lnRef idx="2">
+              <a:schemeClr val="accent1">
+                <a:shade val="15000"/>
+              </a:schemeClr>
+            </a:lnRef>
+            <a:fillRef idx="1">
+              <a:schemeClr val="accent1"/>
+            </a:fillRef>
+            <a:effectRef idx="0">
+              <a:schemeClr val="accent1"/>
+            </a:effectRef>
+            <a:fontRef idx="minor">
+              <a:schemeClr val="lt1"/>
+            </a:fontRef>
+          </p:style>
+          <p:txBody>
+            <a:bodyPr rtlCol="0" anchor="ctr"/>
+            <a:lstStyle/>
+            <a:p>
+              <a:pPr algn="ctr"/>
+              <a:endParaRPr lang="en-US"/>
+            </a:p>
+          </p:txBody>
+        </p:sp>
+        <p:sp>
+          <p:nvSpPr>
+            <p:cNvPr id="374" name="TextBox 373">
+              <a:extLst>
+                <a:ext uri="{FF2B5EF4-FFF2-40B4-BE49-F238E27FC236}">
+                  <a16:creationId xmlns:a16="http://schemas.microsoft.com/office/drawing/2014/main" id="{215D421C-0835-89D7-CE91-1672DA9BCFAD}"/>
+                </a:ext>
+              </a:extLst>
+            </p:cNvPr>
+            <p:cNvSpPr txBox="1"/>
+            <p:nvPr/>
+          </p:nvSpPr>
+          <p:spPr>
+            <a:xfrm>
+              <a:off x="8594562" y="4631275"/>
+              <a:ext cx="941533" cy="369332"/>
+            </a:xfrm>
+            <a:prstGeom prst="rect">
+              <a:avLst/>
+            </a:prstGeom>
+            <a:noFill/>
+          </p:spPr>
+          <p:txBody>
+            <a:bodyPr wrap="square" rtlCol="0">
+              <a:spAutoFit/>
+            </a:bodyPr>
+            <a:lstStyle/>
+            <a:p>
+              <a:r>
+                <a:rPr lang="en-US" b="1" dirty="0">
+                  <a:solidFill>
+                    <a:srgbClr val="AC0000"/>
+                  </a:solidFill>
+                </a:rPr>
+                <a:t>DAG 8</a:t>
+              </a:r>
+            </a:p>
+          </p:txBody>
+        </p:sp>
+        <p:sp>
+          <p:nvSpPr>
+            <p:cNvPr id="54" name="Rectangle 53">
+              <a:extLst>
+                <a:ext uri="{FF2B5EF4-FFF2-40B4-BE49-F238E27FC236}">
+                  <a16:creationId xmlns:a16="http://schemas.microsoft.com/office/drawing/2014/main" id="{24770A54-94BE-77DA-17C2-2359D8A3A33F}"/>
+                </a:ext>
+              </a:extLst>
+            </p:cNvPr>
+            <p:cNvSpPr/>
+            <p:nvPr/>
+          </p:nvSpPr>
+          <p:spPr>
+            <a:xfrm>
+              <a:off x="6426041" y="4478676"/>
+              <a:ext cx="232321" cy="369996"/>
+            </a:xfrm>
+            <a:prstGeom prst="rect">
+              <a:avLst/>
+            </a:prstGeom>
             <a:solidFill>
+              <a:srgbClr val="00B0F0"/>
+            </a:solidFill>
+            <a:ln>
+              <a:noFill/>
+            </a:ln>
+          </p:spPr>
+          <p:style>
+            <a:lnRef idx="2">
+              <a:schemeClr val="accent1">
+                <a:shade val="15000"/>
+              </a:schemeClr>
+            </a:lnRef>
+            <a:fillRef idx="1">
+              <a:schemeClr val="accent1"/>
+            </a:fillRef>
+            <a:effectRef idx="0">
+              <a:schemeClr val="accent1"/>
+            </a:effectRef>
+            <a:fontRef idx="minor">
+              <a:schemeClr val="lt1"/>
+            </a:fontRef>
+          </p:style>
+          <p:txBody>
+            <a:bodyPr rtlCol="0" anchor="ctr"/>
+            <a:lstStyle/>
+            <a:p>
+              <a:pPr algn="ctr"/>
+              <a:endParaRPr lang="en-US" sz="2000" b="1" dirty="0"/>
+            </a:p>
+          </p:txBody>
+        </p:sp>
+        <p:cxnSp>
+          <p:nvCxnSpPr>
+            <p:cNvPr id="55" name="Straight Arrow Connector 54">
+              <a:extLst>
+                <a:ext uri="{FF2B5EF4-FFF2-40B4-BE49-F238E27FC236}">
+                  <a16:creationId xmlns:a16="http://schemas.microsoft.com/office/drawing/2014/main" id="{33F0C675-6E0F-EA68-C3EF-CE33E11F4700}"/>
+                </a:ext>
+              </a:extLst>
+            </p:cNvPr>
+            <p:cNvCxnSpPr>
+              <a:cxnSpLocks/>
+              <a:stCxn id="54" idx="3"/>
+            </p:cNvCxnSpPr>
+            <p:nvPr/>
+          </p:nvCxnSpPr>
+          <p:spPr>
+            <a:xfrm flipV="1">
+              <a:off x="6658362" y="3612577"/>
+              <a:ext cx="326742" cy="1051097"/>
+            </a:xfrm>
+            <a:prstGeom prst="straightConnector1">
+              <a:avLst/>
+            </a:prstGeom>
+            <a:ln w="28575">
+              <a:solidFill>
+                <a:schemeClr val="tx1"/>
+              </a:solidFill>
+              <a:tailEnd type="triangle"/>
+            </a:ln>
+          </p:spPr>
+          <p:style>
+            <a:lnRef idx="1">
+              <a:schemeClr val="dk1"/>
+            </a:lnRef>
+            <a:fillRef idx="0">
+              <a:schemeClr val="dk1"/>
+            </a:fillRef>
+            <a:effectRef idx="0">
+              <a:schemeClr val="dk1"/>
+            </a:effectRef>
+            <a:fontRef idx="minor">
               <a:schemeClr val="tx1"/>
+            </a:fontRef>
+          </p:style>
+        </p:cxnSp>
+        <p:cxnSp>
+          <p:nvCxnSpPr>
+            <p:cNvPr id="56" name="Straight Arrow Connector 55">
+              <a:extLst>
+                <a:ext uri="{FF2B5EF4-FFF2-40B4-BE49-F238E27FC236}">
+                  <a16:creationId xmlns:a16="http://schemas.microsoft.com/office/drawing/2014/main" id="{A4E1325E-47FE-4A68-3036-FF2A05920BC8}"/>
+                </a:ext>
+              </a:extLst>
+            </p:cNvPr>
+            <p:cNvCxnSpPr>
+              <a:cxnSpLocks/>
+              <a:stCxn id="54" idx="3"/>
+            </p:cNvCxnSpPr>
+            <p:nvPr/>
+          </p:nvCxnSpPr>
+          <p:spPr>
+            <a:xfrm flipV="1">
+              <a:off x="6658362" y="4090467"/>
+              <a:ext cx="326742" cy="573207"/>
+            </a:xfrm>
+            <a:prstGeom prst="straightConnector1">
+              <a:avLst/>
+            </a:prstGeom>
+            <a:ln w="28575">
+              <a:solidFill>
+                <a:schemeClr val="tx1"/>
+              </a:solidFill>
+              <a:tailEnd type="triangle"/>
+            </a:ln>
+          </p:spPr>
+          <p:style>
+            <a:lnRef idx="1">
+              <a:schemeClr val="dk1"/>
+            </a:lnRef>
+            <a:fillRef idx="0">
+              <a:schemeClr val="dk1"/>
+            </a:fillRef>
+            <a:effectRef idx="0">
+              <a:schemeClr val="dk1"/>
+            </a:effectRef>
+            <a:fontRef idx="minor">
+              <a:schemeClr val="tx1"/>
+            </a:fontRef>
+          </p:style>
+        </p:cxnSp>
+        <p:cxnSp>
+          <p:nvCxnSpPr>
+            <p:cNvPr id="61" name="Straight Arrow Connector 60">
+              <a:extLst>
+                <a:ext uri="{FF2B5EF4-FFF2-40B4-BE49-F238E27FC236}">
+                  <a16:creationId xmlns:a16="http://schemas.microsoft.com/office/drawing/2014/main" id="{C0C5751A-F894-DEA1-0219-374E9D83F4F4}"/>
+                </a:ext>
+              </a:extLst>
+            </p:cNvPr>
+            <p:cNvCxnSpPr>
+              <a:cxnSpLocks/>
+              <a:stCxn id="54" idx="3"/>
+            </p:cNvCxnSpPr>
+            <p:nvPr/>
+          </p:nvCxnSpPr>
+          <p:spPr>
+            <a:xfrm flipV="1">
+              <a:off x="6658362" y="4568357"/>
+              <a:ext cx="326742" cy="95317"/>
+            </a:xfrm>
+            <a:prstGeom prst="straightConnector1">
+              <a:avLst/>
+            </a:prstGeom>
+            <a:ln w="28575">
+              <a:solidFill>
+                <a:schemeClr val="tx1"/>
+              </a:solidFill>
+              <a:tailEnd type="triangle"/>
+            </a:ln>
+          </p:spPr>
+          <p:style>
+            <a:lnRef idx="1">
+              <a:schemeClr val="dk1"/>
+            </a:lnRef>
+            <a:fillRef idx="0">
+              <a:schemeClr val="dk1"/>
+            </a:fillRef>
+            <a:effectRef idx="0">
+              <a:schemeClr val="dk1"/>
+            </a:effectRef>
+            <a:fontRef idx="minor">
+              <a:schemeClr val="tx1"/>
+            </a:fontRef>
+          </p:style>
+        </p:cxnSp>
+        <p:cxnSp>
+          <p:nvCxnSpPr>
+            <p:cNvPr id="448" name="Straight Arrow Connector 447">
+              <a:extLst>
+                <a:ext uri="{FF2B5EF4-FFF2-40B4-BE49-F238E27FC236}">
+                  <a16:creationId xmlns:a16="http://schemas.microsoft.com/office/drawing/2014/main" id="{1AA3CB55-A5D1-C8B5-2926-83119CE2A008}"/>
+                </a:ext>
+              </a:extLst>
+            </p:cNvPr>
+            <p:cNvCxnSpPr>
+              <a:cxnSpLocks/>
+              <a:stCxn id="54" idx="3"/>
+            </p:cNvCxnSpPr>
+            <p:nvPr/>
+          </p:nvCxnSpPr>
+          <p:spPr>
+            <a:xfrm>
+              <a:off x="6658362" y="4663674"/>
+              <a:ext cx="326742" cy="382572"/>
+            </a:xfrm>
+            <a:prstGeom prst="straightConnector1">
+              <a:avLst/>
+            </a:prstGeom>
+            <a:ln w="28575">
+              <a:solidFill>
+                <a:schemeClr val="tx1"/>
+              </a:solidFill>
+              <a:tailEnd type="triangle"/>
+            </a:ln>
+          </p:spPr>
+          <p:style>
+            <a:lnRef idx="1">
+              <a:schemeClr val="dk1"/>
+            </a:lnRef>
+            <a:fillRef idx="0">
+              <a:schemeClr val="dk1"/>
+            </a:fillRef>
+            <a:effectRef idx="0">
+              <a:schemeClr val="dk1"/>
+            </a:effectRef>
+            <a:fontRef idx="minor">
+              <a:schemeClr val="tx1"/>
+            </a:fontRef>
+          </p:style>
+        </p:cxnSp>
+        <p:sp>
+          <p:nvSpPr>
+            <p:cNvPr id="455" name="Rectangle 454">
+              <a:extLst>
+                <a:ext uri="{FF2B5EF4-FFF2-40B4-BE49-F238E27FC236}">
+                  <a16:creationId xmlns:a16="http://schemas.microsoft.com/office/drawing/2014/main" id="{4F078DA6-C678-A4F5-74A5-F2841661C1AD}"/>
+                </a:ext>
+              </a:extLst>
+            </p:cNvPr>
+            <p:cNvSpPr/>
+            <p:nvPr/>
+          </p:nvSpPr>
+          <p:spPr>
+            <a:xfrm>
+              <a:off x="6431751" y="3909584"/>
+              <a:ext cx="232321" cy="369996"/>
+            </a:xfrm>
+            <a:prstGeom prst="rect">
+              <a:avLst/>
+            </a:prstGeom>
+            <a:solidFill>
+              <a:srgbClr val="00B0F0"/>
             </a:solidFill>
-            <a:tailEnd type="triangle"/>
-          </a:ln>
-        </p:spPr>
-        <p:style>
-          <a:lnRef idx="1">
-            <a:schemeClr val="dk1"/>
-          </a:lnRef>
-          <a:fillRef idx="0">
-            <a:schemeClr val="dk1"/>
-          </a:fillRef>
-          <a:effectRef idx="0">
-            <a:schemeClr val="dk1"/>
-          </a:effectRef>
-          <a:fontRef idx="minor">
-            <a:schemeClr val="tx1"/>
-          </a:fontRef>
-        </p:style>
-      </p:cxnSp>
-      <p:cxnSp>
-        <p:nvCxnSpPr>
-          <p:cNvPr id="56" name="Straight Arrow Connector 55">
-            <a:extLst>
-              <a:ext uri="{FF2B5EF4-FFF2-40B4-BE49-F238E27FC236}">
-                <a16:creationId xmlns:a16="http://schemas.microsoft.com/office/drawing/2014/main" id="{A4E1325E-47FE-4A68-3036-FF2A05920BC8}"/>
-              </a:ext>
-            </a:extLst>
-          </p:cNvPr>
-          <p:cNvCxnSpPr>
-            <a:cxnSpLocks/>
-            <a:stCxn id="54" idx="3"/>
-          </p:cNvCxnSpPr>
-          <p:nvPr/>
-        </p:nvCxnSpPr>
-        <p:spPr>
-          <a:xfrm flipV="1">
-            <a:off x="6658362" y="4090467"/>
-            <a:ext cx="326742" cy="573207"/>
-          </a:xfrm>
-          <a:prstGeom prst="straightConnector1">
-            <a:avLst/>
-          </a:prstGeom>
-          <a:ln w="28575">
-            <a:solidFill>
+            <a:ln>
+              <a:noFill/>
+            </a:ln>
+          </p:spPr>
+          <p:style>
+            <a:lnRef idx="2">
+              <a:schemeClr val="accent1">
+                <a:shade val="15000"/>
+              </a:schemeClr>
+            </a:lnRef>
+            <a:fillRef idx="1">
+              <a:schemeClr val="accent1"/>
+            </a:fillRef>
+            <a:effectRef idx="0">
+              <a:schemeClr val="accent1"/>
+            </a:effectRef>
+            <a:fontRef idx="minor">
+              <a:schemeClr val="lt1"/>
+            </a:fontRef>
+          </p:style>
+          <p:txBody>
+            <a:bodyPr rtlCol="0" anchor="ctr"/>
+            <a:lstStyle/>
+            <a:p>
+              <a:pPr algn="ctr"/>
+              <a:endParaRPr lang="en-US" sz="2000" b="1"/>
+            </a:p>
+          </p:txBody>
+        </p:sp>
+        <p:cxnSp>
+          <p:nvCxnSpPr>
+            <p:cNvPr id="456" name="Straight Arrow Connector 455">
+              <a:extLst>
+                <a:ext uri="{FF2B5EF4-FFF2-40B4-BE49-F238E27FC236}">
+                  <a16:creationId xmlns:a16="http://schemas.microsoft.com/office/drawing/2014/main" id="{EE4558E4-B48F-71DB-2688-F9D016514ACB}"/>
+                </a:ext>
+              </a:extLst>
+            </p:cNvPr>
+            <p:cNvCxnSpPr>
+              <a:cxnSpLocks/>
+              <a:stCxn id="455" idx="3"/>
+            </p:cNvCxnSpPr>
+            <p:nvPr/>
+          </p:nvCxnSpPr>
+          <p:spPr>
+            <a:xfrm flipV="1">
+              <a:off x="6664072" y="3616039"/>
+              <a:ext cx="338222" cy="478543"/>
+            </a:xfrm>
+            <a:prstGeom prst="straightConnector1">
+              <a:avLst/>
+            </a:prstGeom>
+            <a:ln w="28575">
+              <a:solidFill>
+                <a:schemeClr val="tx1"/>
+              </a:solidFill>
+              <a:tailEnd type="triangle"/>
+            </a:ln>
+          </p:spPr>
+          <p:style>
+            <a:lnRef idx="1">
+              <a:schemeClr val="dk1"/>
+            </a:lnRef>
+            <a:fillRef idx="0">
+              <a:schemeClr val="dk1"/>
+            </a:fillRef>
+            <a:effectRef idx="0">
+              <a:schemeClr val="dk1"/>
+            </a:effectRef>
+            <a:fontRef idx="minor">
               <a:schemeClr val="tx1"/>
-            </a:solidFill>
-            <a:tailEnd type="triangle"/>
-          </a:ln>
-        </p:spPr>
-        <p:style>
-          <a:lnRef idx="1">
-            <a:schemeClr val="dk1"/>
-          </a:lnRef>
-          <a:fillRef idx="0">
-            <a:schemeClr val="dk1"/>
-          </a:fillRef>
-          <a:effectRef idx="0">
-            <a:schemeClr val="dk1"/>
-          </a:effectRef>
-          <a:fontRef idx="minor">
-            <a:schemeClr val="tx1"/>
-          </a:fontRef>
-        </p:style>
-      </p:cxnSp>
-      <p:cxnSp>
-        <p:nvCxnSpPr>
-          <p:cNvPr id="61" name="Straight Arrow Connector 60">
-            <a:extLst>
-              <a:ext uri="{FF2B5EF4-FFF2-40B4-BE49-F238E27FC236}">
-                <a16:creationId xmlns:a16="http://schemas.microsoft.com/office/drawing/2014/main" id="{C0C5751A-F894-DEA1-0219-374E9D83F4F4}"/>
-              </a:ext>
-            </a:extLst>
-          </p:cNvPr>
-          <p:cNvCxnSpPr>
-            <a:cxnSpLocks/>
-            <a:stCxn id="54" idx="3"/>
-          </p:cNvCxnSpPr>
-          <p:nvPr/>
-        </p:nvCxnSpPr>
-        <p:spPr>
-          <a:xfrm flipV="1">
-            <a:off x="6658362" y="4568357"/>
-            <a:ext cx="326742" cy="95317"/>
-          </a:xfrm>
-          <a:prstGeom prst="straightConnector1">
-            <a:avLst/>
-          </a:prstGeom>
-          <a:ln w="28575">
-            <a:solidFill>
+            </a:fontRef>
+          </p:style>
+        </p:cxnSp>
+        <p:cxnSp>
+          <p:nvCxnSpPr>
+            <p:cNvPr id="457" name="Straight Arrow Connector 456">
+              <a:extLst>
+                <a:ext uri="{FF2B5EF4-FFF2-40B4-BE49-F238E27FC236}">
+                  <a16:creationId xmlns:a16="http://schemas.microsoft.com/office/drawing/2014/main" id="{7624C919-F6BE-A179-648B-A984B74B6E8F}"/>
+                </a:ext>
+              </a:extLst>
+            </p:cNvPr>
+            <p:cNvCxnSpPr>
+              <a:cxnSpLocks/>
+              <a:stCxn id="455" idx="3"/>
+            </p:cNvCxnSpPr>
+            <p:nvPr/>
+          </p:nvCxnSpPr>
+          <p:spPr>
+            <a:xfrm flipV="1">
+              <a:off x="6664072" y="4093929"/>
+              <a:ext cx="338222" cy="653"/>
+            </a:xfrm>
+            <a:prstGeom prst="straightConnector1">
+              <a:avLst/>
+            </a:prstGeom>
+            <a:ln w="28575">
+              <a:solidFill>
+                <a:schemeClr val="tx1"/>
+              </a:solidFill>
+              <a:tailEnd type="triangle"/>
+            </a:ln>
+          </p:spPr>
+          <p:style>
+            <a:lnRef idx="1">
+              <a:schemeClr val="dk1"/>
+            </a:lnRef>
+            <a:fillRef idx="0">
+              <a:schemeClr val="dk1"/>
+            </a:fillRef>
+            <a:effectRef idx="0">
+              <a:schemeClr val="dk1"/>
+            </a:effectRef>
+            <a:fontRef idx="minor">
               <a:schemeClr val="tx1"/>
-            </a:solidFill>
-            <a:tailEnd type="triangle"/>
-          </a:ln>
-        </p:spPr>
-        <p:style>
-          <a:lnRef idx="1">
-            <a:schemeClr val="dk1"/>
-          </a:lnRef>
-          <a:fillRef idx="0">
-            <a:schemeClr val="dk1"/>
-          </a:fillRef>
-          <a:effectRef idx="0">
-            <a:schemeClr val="dk1"/>
-          </a:effectRef>
-          <a:fontRef idx="minor">
-            <a:schemeClr val="tx1"/>
-          </a:fontRef>
-        </p:style>
-      </p:cxnSp>
-      <p:cxnSp>
-        <p:nvCxnSpPr>
-          <p:cNvPr id="448" name="Straight Arrow Connector 447">
-            <a:extLst>
-              <a:ext uri="{FF2B5EF4-FFF2-40B4-BE49-F238E27FC236}">
-                <a16:creationId xmlns:a16="http://schemas.microsoft.com/office/drawing/2014/main" id="{1AA3CB55-A5D1-C8B5-2926-83119CE2A008}"/>
-              </a:ext>
-            </a:extLst>
-          </p:cNvPr>
-          <p:cNvCxnSpPr>
-            <a:cxnSpLocks/>
-            <a:stCxn id="54" idx="3"/>
-          </p:cNvCxnSpPr>
-          <p:nvPr/>
-        </p:nvCxnSpPr>
-        <p:spPr>
-          <a:xfrm>
-            <a:off x="6658362" y="4663674"/>
-            <a:ext cx="326742" cy="382572"/>
-          </a:xfrm>
-          <a:prstGeom prst="straightConnector1">
-            <a:avLst/>
-          </a:prstGeom>
-          <a:ln w="28575">
-            <a:solidFill>
+            </a:fontRef>
+          </p:style>
+        </p:cxnSp>
+        <p:cxnSp>
+          <p:nvCxnSpPr>
+            <p:cNvPr id="458" name="Straight Arrow Connector 457">
+              <a:extLst>
+                <a:ext uri="{FF2B5EF4-FFF2-40B4-BE49-F238E27FC236}">
+                  <a16:creationId xmlns:a16="http://schemas.microsoft.com/office/drawing/2014/main" id="{E83B1111-5FDB-D5FC-9678-6AF0AC0111F5}"/>
+                </a:ext>
+              </a:extLst>
+            </p:cNvPr>
+            <p:cNvCxnSpPr>
+              <a:cxnSpLocks/>
+              <a:stCxn id="455" idx="3"/>
+            </p:cNvCxnSpPr>
+            <p:nvPr/>
+          </p:nvCxnSpPr>
+          <p:spPr>
+            <a:xfrm>
+              <a:off x="6664072" y="4094582"/>
+              <a:ext cx="338222" cy="477237"/>
+            </a:xfrm>
+            <a:prstGeom prst="straightConnector1">
+              <a:avLst/>
+            </a:prstGeom>
+            <a:ln w="28575">
+              <a:solidFill>
+                <a:schemeClr val="tx1"/>
+              </a:solidFill>
+              <a:tailEnd type="triangle"/>
+            </a:ln>
+          </p:spPr>
+          <p:style>
+            <a:lnRef idx="1">
+              <a:schemeClr val="dk1"/>
+            </a:lnRef>
+            <a:fillRef idx="0">
+              <a:schemeClr val="dk1"/>
+            </a:fillRef>
+            <a:effectRef idx="0">
+              <a:schemeClr val="dk1"/>
+            </a:effectRef>
+            <a:fontRef idx="minor">
               <a:schemeClr val="tx1"/>
-            </a:solidFill>
-            <a:tailEnd type="triangle"/>
-          </a:ln>
-        </p:spPr>
-        <p:style>
-          <a:lnRef idx="1">
-            <a:schemeClr val="dk1"/>
-          </a:lnRef>
-          <a:fillRef idx="0">
-            <a:schemeClr val="dk1"/>
-          </a:fillRef>
-          <a:effectRef idx="0">
-            <a:schemeClr val="dk1"/>
-          </a:effectRef>
-          <a:fontRef idx="minor">
-            <a:schemeClr val="tx1"/>
-          </a:fontRef>
-        </p:style>
-      </p:cxnSp>
-      <p:sp>
-        <p:nvSpPr>
-          <p:cNvPr id="455" name="Rectangle 454">
-            <a:extLst>
-              <a:ext uri="{FF2B5EF4-FFF2-40B4-BE49-F238E27FC236}">
-                <a16:creationId xmlns:a16="http://schemas.microsoft.com/office/drawing/2014/main" id="{4F078DA6-C678-A4F5-74A5-F2841661C1AD}"/>
-              </a:ext>
-            </a:extLst>
-          </p:cNvPr>
-          <p:cNvSpPr/>
-          <p:nvPr/>
-        </p:nvSpPr>
-        <p:spPr>
-          <a:xfrm>
-            <a:off x="6431751" y="3909584"/>
-            <a:ext cx="232321" cy="369996"/>
-          </a:xfrm>
-          <a:prstGeom prst="rect">
-            <a:avLst/>
-          </a:prstGeom>
-          <a:solidFill>
-            <a:srgbClr val="00B0F0"/>
-          </a:solidFill>
-          <a:ln>
-            <a:noFill/>
-          </a:ln>
-        </p:spPr>
-        <p:style>
-          <a:lnRef idx="2">
-            <a:schemeClr val="accent1">
-              <a:shade val="15000"/>
-            </a:schemeClr>
-          </a:lnRef>
-          <a:fillRef idx="1">
-            <a:schemeClr val="accent1"/>
-          </a:fillRef>
-          <a:effectRef idx="0">
-            <a:schemeClr val="accent1"/>
-          </a:effectRef>
-          <a:fontRef idx="minor">
-            <a:schemeClr val="lt1"/>
-          </a:fontRef>
-        </p:style>
-        <p:txBody>
-          <a:bodyPr rtlCol="0" anchor="ctr"/>
-          <a:lstStyle/>
-          <a:p>
-            <a:pPr algn="ctr"/>
-            <a:endParaRPr lang="en-US" sz="2000" b="1"/>
-          </a:p>
-        </p:txBody>
-      </p:sp>
-      <p:cxnSp>
-        <p:nvCxnSpPr>
-          <p:cNvPr id="456" name="Straight Arrow Connector 455">
-            <a:extLst>
-              <a:ext uri="{FF2B5EF4-FFF2-40B4-BE49-F238E27FC236}">
-                <a16:creationId xmlns:a16="http://schemas.microsoft.com/office/drawing/2014/main" id="{EE4558E4-B48F-71DB-2688-F9D016514ACB}"/>
-              </a:ext>
-            </a:extLst>
-          </p:cNvPr>
-          <p:cNvCxnSpPr>
-            <a:cxnSpLocks/>
-            <a:stCxn id="455" idx="3"/>
-          </p:cNvCxnSpPr>
-          <p:nvPr/>
-        </p:nvCxnSpPr>
-        <p:spPr>
-          <a:xfrm flipV="1">
-            <a:off x="6664072" y="3616039"/>
-            <a:ext cx="338222" cy="478543"/>
-          </a:xfrm>
-          <a:prstGeom prst="straightConnector1">
-            <a:avLst/>
-          </a:prstGeom>
-          <a:ln w="28575">
-            <a:solidFill>
+            </a:fontRef>
+          </p:style>
+        </p:cxnSp>
+        <p:cxnSp>
+          <p:nvCxnSpPr>
+            <p:cNvPr id="459" name="Straight Arrow Connector 458">
+              <a:extLst>
+                <a:ext uri="{FF2B5EF4-FFF2-40B4-BE49-F238E27FC236}">
+                  <a16:creationId xmlns:a16="http://schemas.microsoft.com/office/drawing/2014/main" id="{031F0612-AD43-3BB7-33AF-05C71B5E610B}"/>
+                </a:ext>
+              </a:extLst>
+            </p:cNvPr>
+            <p:cNvCxnSpPr>
+              <a:cxnSpLocks/>
+              <a:stCxn id="455" idx="3"/>
+            </p:cNvCxnSpPr>
+            <p:nvPr/>
+          </p:nvCxnSpPr>
+          <p:spPr>
+            <a:xfrm>
+              <a:off x="6664072" y="4094582"/>
+              <a:ext cx="338222" cy="955126"/>
+            </a:xfrm>
+            <a:prstGeom prst="straightConnector1">
+              <a:avLst/>
+            </a:prstGeom>
+            <a:ln w="28575">
+              <a:solidFill>
+                <a:schemeClr val="tx1"/>
+              </a:solidFill>
+              <a:tailEnd type="triangle"/>
+            </a:ln>
+          </p:spPr>
+          <p:style>
+            <a:lnRef idx="1">
+              <a:schemeClr val="dk1"/>
+            </a:lnRef>
+            <a:fillRef idx="0">
+              <a:schemeClr val="dk1"/>
+            </a:fillRef>
+            <a:effectRef idx="0">
+              <a:schemeClr val="dk1"/>
+            </a:effectRef>
+            <a:fontRef idx="minor">
               <a:schemeClr val="tx1"/>
-            </a:solidFill>
-            <a:tailEnd type="triangle"/>
-          </a:ln>
-        </p:spPr>
-        <p:style>
-          <a:lnRef idx="1">
-            <a:schemeClr val="dk1"/>
-          </a:lnRef>
-          <a:fillRef idx="0">
-            <a:schemeClr val="dk1"/>
-          </a:fillRef>
-          <a:effectRef idx="0">
-            <a:schemeClr val="dk1"/>
-          </a:effectRef>
-          <a:fontRef idx="minor">
-            <a:schemeClr val="tx1"/>
-          </a:fontRef>
-        </p:style>
-      </p:cxnSp>
-      <p:cxnSp>
-        <p:nvCxnSpPr>
-          <p:cNvPr id="457" name="Straight Arrow Connector 456">
-            <a:extLst>
-              <a:ext uri="{FF2B5EF4-FFF2-40B4-BE49-F238E27FC236}">
-                <a16:creationId xmlns:a16="http://schemas.microsoft.com/office/drawing/2014/main" id="{7624C919-F6BE-A179-648B-A984B74B6E8F}"/>
-              </a:ext>
-            </a:extLst>
-          </p:cNvPr>
-          <p:cNvCxnSpPr>
-            <a:cxnSpLocks/>
-            <a:stCxn id="455" idx="3"/>
-          </p:cNvCxnSpPr>
-          <p:nvPr/>
-        </p:nvCxnSpPr>
-        <p:spPr>
-          <a:xfrm flipV="1">
-            <a:off x="6664072" y="4093929"/>
-            <a:ext cx="338222" cy="653"/>
-          </a:xfrm>
-          <a:prstGeom prst="straightConnector1">
-            <a:avLst/>
-          </a:prstGeom>
-          <a:ln w="28575">
-            <a:solidFill>
-              <a:schemeClr val="tx1"/>
-            </a:solidFill>
-            <a:tailEnd type="triangle"/>
-          </a:ln>
-        </p:spPr>
-        <p:style>
-          <a:lnRef idx="1">
-            <a:schemeClr val="dk1"/>
-          </a:lnRef>
-          <a:fillRef idx="0">
-            <a:schemeClr val="dk1"/>
-          </a:fillRef>
-          <a:effectRef idx="0">
-            <a:schemeClr val="dk1"/>
-          </a:effectRef>
-          <a:fontRef idx="minor">
-            <a:schemeClr val="tx1"/>
-          </a:fontRef>
-        </p:style>
-      </p:cxnSp>
-      <p:cxnSp>
-        <p:nvCxnSpPr>
-          <p:cNvPr id="458" name="Straight Arrow Connector 457">
-            <a:extLst>
-              <a:ext uri="{FF2B5EF4-FFF2-40B4-BE49-F238E27FC236}">
-                <a16:creationId xmlns:a16="http://schemas.microsoft.com/office/drawing/2014/main" id="{E83B1111-5FDB-D5FC-9678-6AF0AC0111F5}"/>
-              </a:ext>
-            </a:extLst>
-          </p:cNvPr>
-          <p:cNvCxnSpPr>
-            <a:cxnSpLocks/>
-            <a:stCxn id="455" idx="3"/>
-          </p:cNvCxnSpPr>
-          <p:nvPr/>
-        </p:nvCxnSpPr>
-        <p:spPr>
-          <a:xfrm>
-            <a:off x="6664072" y="4094582"/>
-            <a:ext cx="338222" cy="477237"/>
-          </a:xfrm>
-          <a:prstGeom prst="straightConnector1">
-            <a:avLst/>
-          </a:prstGeom>
-          <a:ln w="28575">
-            <a:solidFill>
-              <a:schemeClr val="tx1"/>
-            </a:solidFill>
-            <a:tailEnd type="triangle"/>
-          </a:ln>
-        </p:spPr>
-        <p:style>
-          <a:lnRef idx="1">
-            <a:schemeClr val="dk1"/>
-          </a:lnRef>
-          <a:fillRef idx="0">
-            <a:schemeClr val="dk1"/>
-          </a:fillRef>
-          <a:effectRef idx="0">
-            <a:schemeClr val="dk1"/>
-          </a:effectRef>
-          <a:fontRef idx="minor">
-            <a:schemeClr val="tx1"/>
-          </a:fontRef>
-        </p:style>
-      </p:cxnSp>
-      <p:cxnSp>
-        <p:nvCxnSpPr>
-          <p:cNvPr id="459" name="Straight Arrow Connector 458">
-            <a:extLst>
-              <a:ext uri="{FF2B5EF4-FFF2-40B4-BE49-F238E27FC236}">
-                <a16:creationId xmlns:a16="http://schemas.microsoft.com/office/drawing/2014/main" id="{031F0612-AD43-3BB7-33AF-05C71B5E610B}"/>
-              </a:ext>
-            </a:extLst>
-          </p:cNvPr>
-          <p:cNvCxnSpPr>
-            <a:cxnSpLocks/>
-            <a:stCxn id="455" idx="3"/>
-          </p:cNvCxnSpPr>
-          <p:nvPr/>
-        </p:nvCxnSpPr>
-        <p:spPr>
-          <a:xfrm>
-            <a:off x="6664072" y="4094582"/>
-            <a:ext cx="338222" cy="955126"/>
-          </a:xfrm>
-          <a:prstGeom prst="straightConnector1">
-            <a:avLst/>
-          </a:prstGeom>
-          <a:ln w="28575">
-            <a:solidFill>
-              <a:schemeClr val="tx1"/>
-            </a:solidFill>
-            <a:tailEnd type="triangle"/>
-          </a:ln>
-        </p:spPr>
-        <p:style>
-          <a:lnRef idx="1">
-            <a:schemeClr val="dk1"/>
-          </a:lnRef>
-          <a:fillRef idx="0">
-            <a:schemeClr val="dk1"/>
-          </a:fillRef>
-          <a:effectRef idx="0">
-            <a:schemeClr val="dk1"/>
-          </a:effectRef>
-          <a:fontRef idx="minor">
-            <a:schemeClr val="tx1"/>
-          </a:fontRef>
-        </p:style>
-      </p:cxnSp>
+            </a:fontRef>
+          </p:style>
+        </p:cxnSp>
+      </p:grpSp>
     </p:spTree>
     <p:extLst>
       <p:ext uri="{BB962C8B-B14F-4D97-AF65-F5344CB8AC3E}">
